--- a/assets/template.pptx
+++ b/assets/template.pptx
@@ -16,9 +16,10 @@
     <p:sldId id="264" r:id="rId10"/>
     <p:sldId id="265" r:id="rId11"/>
     <p:sldId id="266" r:id="rId12"/>
+    <p:sldId id="267" r:id="rId13"/>
   </p:sldIdLst>
   <p:notesMasterIdLst>
-    <p:notesMasterId r:id="rId13"/>
+    <p:notesMasterId r:id="rId14"/>
   </p:notesMasterIdLst>
   <p:sldSz cx="12192000" cy="6858000"/>
   <p:notesSz cx="6858000" cy="12192000"/>
@@ -117,39 +118,40 @@
   <p:extLst>
     <p:ext uri="{521415D9-36F7-43E2-AB2F-B90AF26B5E84}">
       <p14:sectionLst xmlns:p14="http://schemas.microsoft.com/office/powerpoint/2010/main">
-        <p14:section name="Abertura" id="{31561f2e-3dcc-4164-a69d-3461445700b4}">
+        <p14:section name="Abertura" id="{1bd4de4c-f91f-e992-ce7f-f163ab0a1e6d}">
           <p14:sldIdLst>
             <p14:sldId id="256"/>
           </p14:sldIdLst>
         </p14:section>
-        <p14:section name="Síntese" id="{54fa6dbb-a260-cf0a-0fe1-eb6d85398231}">
+        <p14:section name="Síntese" id="{9f447dc9-82f5-882a-b664-1a33efcb806f}">
           <p14:sldIdLst>
             <p14:sldId id="257"/>
+            <p14:sldId id="258"/>
           </p14:sldIdLst>
         </p14:section>
-        <p14:section name="Diagnóstico" id="{c5be8b6d-90b5-463c-fda1-9000118fa34e}">
+        <p14:section name="Diagnóstico" id="{4ca045d2-5071-d7d3-34c9-7c0be4b7dd52}">
           <p14:sldIdLst>
-            <p14:sldId id="258"/>
             <p14:sldId id="259"/>
             <p14:sldId id="260"/>
+            <p14:sldId id="261"/>
           </p14:sldIdLst>
         </p14:section>
-        <p14:section name="Resultados" id="{877d3faa-a891-ca3d-b0ed-66cdedb29e97}">
+        <p14:section name="Resultados" id="{a72d7b47-7bc5-4515-ec96-7432421d9df8}">
           <p14:sldIdLst>
-            <p14:sldId id="261"/>
             <p14:sldId id="262"/>
+            <p14:sldId id="263"/>
           </p14:sldIdLst>
         </p14:section>
-        <p14:section name="Atuação" id="{c3429ffa-d9a0-55c7-c179-43d60cd119aa}">
+        <p14:section name="Atuação" id="{759dd858-640a-8bd7-aaa9-69815dd9d248}">
           <p14:sldIdLst>
-            <p14:sldId id="263"/>
             <p14:sldId id="264"/>
+            <p14:sldId id="265"/>
           </p14:sldIdLst>
         </p14:section>
-        <p14:section name="Conclusão" id="{c9396e30-a18b-a0f3-944c-b206b27eeb75}">
+        <p14:section name="Conclusão" id="{a33d5353-2efb-19e2-0325-de95c9484aa5}">
           <p14:sldIdLst>
-            <p14:sldId id="265"/>
             <p14:sldId id="266"/>
+            <p14:sldId id="267"/>
           </p14:sldIdLst>
         </p14:section>
       </p14:sectionLst>
@@ -162,6 +164,697 @@
 </file>
 
 <file path=ppt/charts/chart1.xml><?xml version="1.0" encoding="utf-8"?>
+<c:chartSpace xmlns:c="http://schemas.openxmlformats.org/drawingml/2006/chart" xmlns:a="http://schemas.openxmlformats.org/drawingml/2006/main" xmlns:r="http://schemas.openxmlformats.org/officeDocument/2006/relationships">
+  <c:date1904 val="0"/>
+  <c:roundedCorners val="1"/>
+  <c:chart>
+    <c:autoTitleDeleted val="1"/>
+    <c:plotArea>
+      <c:layout/>
+      <c:barChart>
+        <c:barDir val="col"/>
+        <c:grouping val="clustered"/>
+        <c:varyColors val="0"/>
+        <c:ser>
+          <c:idx val="0"/>
+          <c:order val="0"/>
+          <c:tx>
+            <c:strRef>
+              <c:f>Sheet1!$B$1</c:f>
+              <c:strCache>
+                <c:ptCount val="1"/>
+                <c:pt idx="0">
+                  <c:v>Taxa de conversão</c:v>
+                </c:pt>
+              </c:strCache>
+            </c:strRef>
+          </c:tx>
+          <c:spPr>
+            <a:solidFill>
+              <a:srgbClr val="C9A7E0"/>
+            </a:solidFill>
+            <a:effectLst/>
+          </c:spPr>
+          <c:invertIfNegative val="0"/>
+          <c:dLbls>
+            <c:numFmt formatCode="0.0%" sourceLinked="0"/>
+            <c:txPr>
+              <a:bodyPr wrap="none"/>
+              <a:lstStyle/>
+              <a:p>
+                <a:pPr>
+                  <a:defRPr b="1" i="0" strike="noStrike" sz="1800" u="none">
+                    <a:solidFill>
+                      <a:srgbClr val="FFFFFF"/>
+                    </a:solidFill>
+                    <a:latin typeface="+mn-lt"/>
+                  </a:defRPr>
+                </a:pPr>
+              </a:p>
+            </c:txPr>
+            <c:showLegendKey val="0"/>
+            <c:showVal val="1"/>
+            <c:showCatName val="0"/>
+            <c:showSerName val="0"/>
+            <c:showPercent val="0"/>
+            <c:showBubbleSize val="0"/>
+            <c:showLeaderLines val="0"/>
+          </c:dLbls>
+          <c:dPt>
+            <c:idx val="0"/>
+            <c:invertIfNegative val="0"/>
+            <c:bubble3D val="0"/>
+            <c:spPr>
+              <a:solidFill>
+                <a:srgbClr val="C9A7E0"/>
+              </a:solidFill>
+              <a:effectLst/>
+            </c:spPr>
+          </c:dPt>
+          <c:dPt>
+            <c:idx val="1"/>
+            <c:invertIfNegative val="0"/>
+            <c:bubble3D val="0"/>
+            <c:spPr>
+              <a:solidFill>
+                <a:srgbClr val="FFFFFF"/>
+              </a:solidFill>
+              <a:effectLst/>
+            </c:spPr>
+          </c:dPt>
+          <c:cat>
+            <c:multiLvlStrRef>
+              <c:f>Sheet1!$A$2:$A$3</c:f>
+              <c:multiLvlStrCache>
+                <c:ptCount val="2"/>
+                <c:lvl>
+                  <c:pt idx="0">
+                    <c:v>Grupo A</c:v>
+                  </c:pt>
+                  <c:pt idx="1">
+                    <c:v>Grupo B</c:v>
+                  </c:pt>
+                </c:lvl>
+              </c:multiLvlStrCache>
+            </c:multiLvlStrRef>
+          </c:cat>
+          <c:val>
+            <c:numRef>
+              <c:f>Sheet1!$B$2:$B$3</c:f>
+              <c:numCache>
+                <c:formatCode>General</c:formatCode>
+                <c:ptCount val="2"/>
+                <c:pt idx="0">
+                  <c:v>0.25</c:v>
+                </c:pt>
+                <c:pt idx="1">
+                  <c:v>0.62</c:v>
+                </c:pt>
+              </c:numCache>
+            </c:numRef>
+          </c:val>
+        </c:ser>
+        <c:dLbls>
+          <c:numFmt formatCode="0.0%" sourceLinked="0"/>
+          <c:txPr>
+            <a:bodyPr wrap="none"/>
+            <a:lstStyle/>
+            <a:p>
+              <a:pPr>
+                <a:defRPr b="1" i="0" strike="noStrike" sz="1800" u="none">
+                  <a:solidFill>
+                    <a:srgbClr val="FFFFFF"/>
+                  </a:solidFill>
+                  <a:latin typeface="+mn-lt"/>
+                </a:defRPr>
+              </a:pPr>
+            </a:p>
+          </c:txPr>
+          <c:showLegendKey val="0"/>
+          <c:showVal val="1"/>
+          <c:showCatName val="0"/>
+          <c:showSerName val="0"/>
+          <c:showPercent val="0"/>
+          <c:showBubbleSize val="0"/>
+          <c:showLeaderLines val="0"/>
+        </c:dLbls>
+        <c:gapWidth val="30"/>
+        <c:overlap val="0"/>
+        <c:axId val="2094734554"/>
+        <c:axId val="2094734552"/>
+        <c:axId val="2094734556"/>
+      </c:barChart>
+      <c:catAx>
+        <c:axId val="2094734554"/>
+        <c:scaling>
+          <c:orientation val="minMax"/>
+        </c:scaling>
+        <c:delete val="0"/>
+        <c:axPos val="b"/>
+        <c:numFmt formatCode="General" sourceLinked="1"/>
+        <c:majorTickMark val="out"/>
+        <c:minorTickMark val="none"/>
+        <c:tickLblPos val="low"/>
+        <c:spPr>
+          <a:ln w="12700" cap="flat">
+            <a:noFill/>
+            <a:prstDash val="solid"/>
+            <a:round/>
+          </a:ln>
+        </c:spPr>
+        <c:txPr>
+          <a:bodyPr/>
+          <a:lstStyle/>
+          <a:p>
+            <a:pPr>
+              <a:defRPr sz="1200" b="1" i="0" u="none" strike="noStrike">
+                <a:solidFill>
+                  <a:srgbClr val="FFFFFF"/>
+                </a:solidFill>
+                <a:latin typeface="+mn-lt"/>
+              </a:defRPr>
+            </a:pPr>
+            <a:endParaRPr lang="en-US"/>
+          </a:p>
+        </c:txPr>
+        <c:crossAx val="2094734552"/>
+        <c:crosses val="autoZero"/>
+        <c:auto val="1"/>
+        <c:lblAlgn val="ctr"/>
+        <c:noMultiLvlLbl val="1"/>
+      </c:catAx>
+      <c:valAx>
+        <c:axId val="2094734552"/>
+        <c:scaling>
+          <c:orientation val="minMax"/>
+          <c:max val="0.775"/>
+          <c:min val="0"/>
+        </c:scaling>
+        <c:delete val="1"/>
+        <c:axPos val="l"/>
+        <c:numFmt formatCode="General" sourceLinked="0"/>
+        <c:majorTickMark val="out"/>
+        <c:minorTickMark val="none"/>
+        <c:tickLblPos val="nextTo"/>
+        <c:spPr>
+          <a:ln w="12700" cap="flat">
+            <a:solidFill>
+              <a:srgbClr val="888888"/>
+            </a:solidFill>
+            <a:prstDash val="solid"/>
+            <a:round/>
+          </a:ln>
+        </c:spPr>
+        <c:txPr>
+          <a:bodyPr/>
+          <a:lstStyle/>
+          <a:p>
+            <a:pPr>
+              <a:defRPr sz="1200" b="0" i="0" u="none" strike="noStrike">
+                <a:solidFill>
+                  <a:srgbClr val="000000"/>
+                </a:solidFill>
+                <a:latin typeface="Arial"/>
+              </a:defRPr>
+            </a:pPr>
+            <a:endParaRPr lang="en-US"/>
+          </a:p>
+        </c:txPr>
+        <c:crossAx val="2094734554"/>
+        <c:crosses val="autoZero"/>
+        <c:crossBetween val="between"/>
+      </c:valAx>
+      <c:spPr>
+        <a:noFill/>
+        <a:ln>
+          <a:noFill/>
+        </a:ln>
+        <a:effectLst/>
+      </c:spPr>
+    </c:plotArea>
+    <c:plotVisOnly val="1"/>
+    <c:dispBlanksAs val="span"/>
+  </c:chart>
+  <c:spPr>
+    <a:noFill/>
+    <a:ln>
+      <a:noFill/>
+    </a:ln>
+    <a:effectLst/>
+  </c:spPr>
+  <c:externalData r:id="rId1">
+    <c:autoUpdate val="0"/>
+  </c:externalData>
+</c:chartSpace>
+</file>
+
+<file path=ppt/charts/chart2.xml><?xml version="1.0" encoding="utf-8"?>
+<c:chartSpace xmlns:c="http://schemas.openxmlformats.org/drawingml/2006/chart" xmlns:a="http://schemas.openxmlformats.org/drawingml/2006/main" xmlns:r="http://schemas.openxmlformats.org/officeDocument/2006/relationships">
+  <c:date1904 val="0"/>
+  <c:roundedCorners val="1"/>
+  <c:chart>
+    <c:autoTitleDeleted val="1"/>
+    <c:plotArea>
+      <c:layout/>
+      <c:barChart>
+        <c:barDir val="col"/>
+        <c:grouping val="clustered"/>
+        <c:varyColors val="0"/>
+        <c:ser>
+          <c:idx val="0"/>
+          <c:order val="0"/>
+          <c:tx>
+            <c:strRef>
+              <c:f>Sheet1!$B$1</c:f>
+              <c:strCache>
+                <c:ptCount val="1"/>
+                <c:pt idx="0">
+                  <c:v>Custo médio</c:v>
+                </c:pt>
+              </c:strCache>
+            </c:strRef>
+          </c:tx>
+          <c:spPr>
+            <a:solidFill>
+              <a:srgbClr val="C9A7E0"/>
+            </a:solidFill>
+            <a:effectLst/>
+          </c:spPr>
+          <c:invertIfNegative val="0"/>
+          <c:dLbls>
+            <c:numFmt formatCode="&quot;R$ &quot;#,##0" sourceLinked="0"/>
+            <c:txPr>
+              <a:bodyPr wrap="none"/>
+              <a:lstStyle/>
+              <a:p>
+                <a:pPr>
+                  <a:defRPr b="1" i="0" strike="noStrike" sz="1800" u="none">
+                    <a:solidFill>
+                      <a:srgbClr val="660099"/>
+                    </a:solidFill>
+                    <a:latin typeface="+mn-lt"/>
+                  </a:defRPr>
+                </a:pPr>
+              </a:p>
+            </c:txPr>
+            <c:showLegendKey val="0"/>
+            <c:showVal val="1"/>
+            <c:showCatName val="0"/>
+            <c:showSerName val="0"/>
+            <c:showPercent val="0"/>
+            <c:showBubbleSize val="0"/>
+            <c:showLeaderLines val="0"/>
+          </c:dLbls>
+          <c:dPt>
+            <c:idx val="0"/>
+            <c:invertIfNegative val="0"/>
+            <c:bubble3D val="0"/>
+            <c:spPr>
+              <a:solidFill>
+                <a:srgbClr val="C9A7E0"/>
+              </a:solidFill>
+              <a:effectLst/>
+            </c:spPr>
+          </c:dPt>
+          <c:dPt>
+            <c:idx val="1"/>
+            <c:invertIfNegative val="0"/>
+            <c:bubble3D val="0"/>
+            <c:spPr>
+              <a:solidFill>
+                <a:srgbClr val="660099"/>
+              </a:solidFill>
+              <a:effectLst/>
+            </c:spPr>
+          </c:dPt>
+          <c:cat>
+            <c:multiLvlStrRef>
+              <c:f>Sheet1!$A$2:$A$3</c:f>
+              <c:multiLvlStrCache>
+                <c:ptCount val="2"/>
+                <c:lvl>
+                  <c:pt idx="0">
+                    <c:v>Grupo A</c:v>
+                  </c:pt>
+                  <c:pt idx="1">
+                    <c:v>Grupo B</c:v>
+                  </c:pt>
+                </c:lvl>
+              </c:multiLvlStrCache>
+            </c:multiLvlStrRef>
+          </c:cat>
+          <c:val>
+            <c:numRef>
+              <c:f>Sheet1!$B$2:$B$3</c:f>
+              <c:numCache>
+                <c:formatCode>General</c:formatCode>
+                <c:ptCount val="2"/>
+                <c:pt idx="0">
+                  <c:v>4000</c:v>
+                </c:pt>
+                <c:pt idx="1">
+                  <c:v>2400</c:v>
+                </c:pt>
+              </c:numCache>
+            </c:numRef>
+          </c:val>
+        </c:ser>
+        <c:dLbls>
+          <c:numFmt formatCode="&quot;R$ &quot;#,##0" sourceLinked="0"/>
+          <c:txPr>
+            <a:bodyPr wrap="none"/>
+            <a:lstStyle/>
+            <a:p>
+              <a:pPr>
+                <a:defRPr b="1" i="0" strike="noStrike" sz="1800" u="none">
+                  <a:solidFill>
+                    <a:srgbClr val="660099"/>
+                  </a:solidFill>
+                  <a:latin typeface="+mn-lt"/>
+                </a:defRPr>
+              </a:pPr>
+            </a:p>
+          </c:txPr>
+          <c:showLegendKey val="0"/>
+          <c:showVal val="1"/>
+          <c:showCatName val="0"/>
+          <c:showSerName val="0"/>
+          <c:showPercent val="0"/>
+          <c:showBubbleSize val="0"/>
+          <c:showLeaderLines val="0"/>
+        </c:dLbls>
+        <c:gapWidth val="30"/>
+        <c:overlap val="0"/>
+        <c:axId val="2094734554"/>
+        <c:axId val="2094734552"/>
+        <c:axId val="2094734556"/>
+      </c:barChart>
+      <c:catAx>
+        <c:axId val="2094734554"/>
+        <c:scaling>
+          <c:orientation val="minMax"/>
+        </c:scaling>
+        <c:delete val="0"/>
+        <c:axPos val="b"/>
+        <c:numFmt formatCode="General" sourceLinked="1"/>
+        <c:majorTickMark val="out"/>
+        <c:minorTickMark val="none"/>
+        <c:tickLblPos val="low"/>
+        <c:spPr>
+          <a:ln w="12700" cap="flat">
+            <a:noFill/>
+            <a:prstDash val="solid"/>
+            <a:round/>
+          </a:ln>
+        </c:spPr>
+        <c:txPr>
+          <a:bodyPr/>
+          <a:lstStyle/>
+          <a:p>
+            <a:pPr>
+              <a:defRPr sz="1200" b="1" i="0" u="none" strike="noStrike">
+                <a:solidFill>
+                  <a:srgbClr val="1A1A1A"/>
+                </a:solidFill>
+                <a:latin typeface="+mn-lt"/>
+              </a:defRPr>
+            </a:pPr>
+            <a:endParaRPr lang="en-US"/>
+          </a:p>
+        </c:txPr>
+        <c:crossAx val="2094734552"/>
+        <c:crosses val="autoZero"/>
+        <c:auto val="1"/>
+        <c:lblAlgn val="ctr"/>
+        <c:noMultiLvlLbl val="1"/>
+      </c:catAx>
+      <c:valAx>
+        <c:axId val="2094734552"/>
+        <c:scaling>
+          <c:orientation val="minMax"/>
+          <c:max val="5000"/>
+          <c:min val="0"/>
+        </c:scaling>
+        <c:delete val="1"/>
+        <c:axPos val="l"/>
+        <c:numFmt formatCode="General" sourceLinked="0"/>
+        <c:majorTickMark val="out"/>
+        <c:minorTickMark val="none"/>
+        <c:tickLblPos val="nextTo"/>
+        <c:spPr>
+          <a:ln w="12700" cap="flat">
+            <a:solidFill>
+              <a:srgbClr val="888888"/>
+            </a:solidFill>
+            <a:prstDash val="solid"/>
+            <a:round/>
+          </a:ln>
+        </c:spPr>
+        <c:txPr>
+          <a:bodyPr/>
+          <a:lstStyle/>
+          <a:p>
+            <a:pPr>
+              <a:defRPr sz="1200" b="0" i="0" u="none" strike="noStrike">
+                <a:solidFill>
+                  <a:srgbClr val="000000"/>
+                </a:solidFill>
+                <a:latin typeface="Arial"/>
+              </a:defRPr>
+            </a:pPr>
+            <a:endParaRPr lang="en-US"/>
+          </a:p>
+        </c:txPr>
+        <c:crossAx val="2094734554"/>
+        <c:crosses val="autoZero"/>
+        <c:crossBetween val="between"/>
+      </c:valAx>
+      <c:spPr>
+        <a:noFill/>
+        <a:ln>
+          <a:noFill/>
+        </a:ln>
+        <a:effectLst/>
+      </c:spPr>
+    </c:plotArea>
+    <c:plotVisOnly val="1"/>
+    <c:dispBlanksAs val="span"/>
+  </c:chart>
+  <c:spPr>
+    <a:noFill/>
+    <a:ln>
+      <a:noFill/>
+    </a:ln>
+    <a:effectLst/>
+  </c:spPr>
+  <c:externalData r:id="rId1">
+    <c:autoUpdate val="0"/>
+  </c:externalData>
+</c:chartSpace>
+</file>
+
+<file path=ppt/charts/chart3.xml><?xml version="1.0" encoding="utf-8"?>
+<c:chartSpace xmlns:c="http://schemas.openxmlformats.org/drawingml/2006/chart" xmlns:a="http://schemas.openxmlformats.org/drawingml/2006/main" xmlns:r="http://schemas.openxmlformats.org/officeDocument/2006/relationships">
+  <c:date1904 val="0"/>
+  <c:roundedCorners val="1"/>
+  <c:chart>
+    <c:autoTitleDeleted val="1"/>
+    <c:plotArea>
+      <c:layout/>
+      <c:doughnutChart>
+        <c:varyColors val="1"/>
+        <c:ser>
+          <c:idx val="0"/>
+          <c:order val="0"/>
+          <c:tx>
+            <c:strRef>
+              <c:f>Sheet1!$B$1</c:f>
+              <c:strCache>
+                <c:ptCount val="1"/>
+                <c:pt idx="0">
+                  <c:v>Participação</c:v>
+                </c:pt>
+              </c:strCache>
+            </c:strRef>
+          </c:tx>
+          <c:spPr>
+            <a:solidFill>
+              <a:schemeClr val="accent1"/>
+            </a:solidFill>
+            <a:ln w="9525" cap="flat">
+              <a:solidFill>
+                <a:srgbClr val="F9F9F9"/>
+              </a:solidFill>
+              <a:prstDash val="solid"/>
+              <a:round/>
+            </a:ln>
+            <a:effectLst/>
+          </c:spPr>
+          <c:dPt>
+            <c:idx val="0"/>
+            <c:bubble3D val="0"/>
+            <c:spPr>
+              <a:solidFill>
+                <a:srgbClr val="660099"/>
+              </a:solidFill>
+              <a:ln w="9525" cap="flat">
+                <a:solidFill>
+                  <a:srgbClr val="F3ECF8"/>
+                </a:solidFill>
+                <a:prstDash val="solid"/>
+                <a:round/>
+              </a:ln>
+              <a:effectLst/>
+            </c:spPr>
+          </c:dPt>
+          <c:dPt>
+            <c:idx val="1"/>
+            <c:bubble3D val="0"/>
+            <c:spPr>
+              <a:solidFill>
+                <a:srgbClr val="C9A7E0"/>
+              </a:solidFill>
+              <a:ln w="9525" cap="flat">
+                <a:solidFill>
+                  <a:srgbClr val="F3ECF8"/>
+                </a:solidFill>
+                <a:prstDash val="solid"/>
+                <a:round/>
+              </a:ln>
+              <a:effectLst/>
+            </c:spPr>
+          </c:dPt>
+          <c:dLbls>
+            <c:dLbl>
+              <c:idx val="0"/>
+              <c:numFmt formatCode="General" sourceLinked="0"/>
+              <c:spPr/>
+              <c:txPr>
+                <a:bodyPr wrap="none"/>
+                <a:lstStyle/>
+                <a:p>
+                  <a:pPr>
+                    <a:defRPr sz="1200" b="0" i="0" u="none" strike="noStrike">
+                      <a:solidFill>
+                        <a:srgbClr val="000000"/>
+                      </a:solidFill>
+                      <a:latin typeface="Arial"/>
+                    </a:defRPr>
+                  </a:pPr>
+                </a:p>
+              </c:txPr>
+              <c:showLegendKey val="0"/>
+              <c:showVal val="0"/>
+              <c:showCatName val="0"/>
+              <c:showSerName val="0"/>
+              <c:showPercent val="0"/>
+              <c:showBubbleSize val="0"/>
+            </c:dLbl>
+            <c:dLbl>
+              <c:idx val="1"/>
+              <c:numFmt formatCode="General" sourceLinked="0"/>
+              <c:spPr/>
+              <c:txPr>
+                <a:bodyPr wrap="none"/>
+                <a:lstStyle/>
+                <a:p>
+                  <a:pPr>
+                    <a:defRPr sz="1200" b="0" i="0" u="none" strike="noStrike">
+                      <a:solidFill>
+                        <a:srgbClr val="000000"/>
+                      </a:solidFill>
+                      <a:latin typeface="Arial"/>
+                    </a:defRPr>
+                  </a:pPr>
+                </a:p>
+              </c:txPr>
+              <c:showLegendKey val="0"/>
+              <c:showVal val="0"/>
+              <c:showCatName val="0"/>
+              <c:showSerName val="0"/>
+              <c:showPercent val="0"/>
+              <c:showBubbleSize val="0"/>
+            </c:dLbl>
+            <c:numFmt formatCode="General" sourceLinked="0"/>
+            <c:txPr>
+              <a:bodyPr wrap="none"/>
+              <a:lstStyle/>
+              <a:p>
+                <a:pPr>
+                  <a:defRPr sz="1800" b="0" i="0" u="none" strike="noStrike">
+                    <a:solidFill>
+                      <a:srgbClr val="000000"/>
+                    </a:solidFill>
+                    <a:latin typeface="Arial"/>
+                  </a:defRPr>
+                </a:pPr>
+              </a:p>
+            </c:txPr>
+            <c:showLegendKey val="0"/>
+            <c:showVal val="0"/>
+            <c:showCatName val="1"/>
+            <c:showSerName val="0"/>
+            <c:showPercent val="1"/>
+            <c:showBubbleSize val="0"/>
+            <c:showLeaderLines val="0"/>
+          </c:dLbls>
+          <c:cat>
+            <c:strRef>
+              <c:f>Sheet1!$A$2:$A$3</c:f>
+              <c:strCache>
+                <c:ptCount val="2"/>
+                <c:pt idx="0">
+                  <c:v>destaque</c:v>
+                </c:pt>
+                <c:pt idx="1">
+                  <c:v>restante</c:v>
+                </c:pt>
+              </c:strCache>
+            </c:strRef>
+          </c:cat>
+          <c:val>
+            <c:numRef>
+              <c:f>Sheet1!$B$2:$B$3</c:f>
+              <c:numCache>
+                <c:ptCount val="2"/>
+                <c:pt idx="0">
+                  <c:v>0.55</c:v>
+                </c:pt>
+                <c:pt idx="1">
+                  <c:v>0.44999999999999996</c:v>
+                </c:pt>
+              </c:numCache>
+            </c:numRef>
+          </c:val>
+        </c:ser>
+        <c:firstSliceAng val="0"/>
+        <c:holeSize val="68"/>
+      </c:doughnutChart>
+      <c:spPr>
+        <a:noFill/>
+        <a:ln>
+          <a:noFill/>
+        </a:ln>
+        <a:effectLst/>
+      </c:spPr>
+    </c:plotArea>
+    <c:plotVisOnly val="1"/>
+    <c:dispBlanksAs val="span"/>
+  </c:chart>
+  <c:spPr>
+    <a:noFill/>
+    <a:ln>
+      <a:noFill/>
+    </a:ln>
+    <a:effectLst/>
+  </c:spPr>
+  <c:externalData r:id="rId1">
+    <c:autoUpdate val="0"/>
+  </c:externalData>
+</c:chartSpace>
+</file>
+
+<file path=ppt/charts/chart4.xml><?xml version="1.0" encoding="utf-8"?>
 <c:chartSpace xmlns:c="http://schemas.openxmlformats.org/drawingml/2006/chart" xmlns:a="http://schemas.openxmlformats.org/drawingml/2006/main" xmlns:r="http://schemas.openxmlformats.org/officeDocument/2006/relationships">
   <c:date1904 val="0"/>
   <c:roundedCorners val="1"/>
@@ -197,7 +890,7 @@
           <c:dLbls>
             <c:numFmt formatCode="#,##0" sourceLinked="0"/>
             <c:txPr>
-              <a:bodyPr/>
+              <a:bodyPr wrap="none"/>
               <a:lstStyle/>
               <a:p>
                 <a:pPr>
@@ -298,7 +991,7 @@
           <c:dLbls>
             <c:numFmt formatCode="#,##0" sourceLinked="0"/>
             <c:txPr>
-              <a:bodyPr/>
+              <a:bodyPr wrap="none"/>
               <a:lstStyle/>
               <a:p>
                 <a:pPr>
@@ -378,7 +1071,7 @@
         <c:dLbls>
           <c:numFmt formatCode="#,##0" sourceLinked="0"/>
           <c:txPr>
-            <a:bodyPr/>
+            <a:bodyPr wrap="none"/>
             <a:lstStyle/>
             <a:p>
               <a:pPr>
@@ -516,7 +1209,7 @@
 </c:chartSpace>
 </file>
 
-<file path=ppt/charts/chart2.xml><?xml version="1.0" encoding="utf-8"?>
+<file path=ppt/charts/chart5.xml><?xml version="1.0" encoding="utf-8"?>
 <c:chartSpace xmlns:c="http://schemas.openxmlformats.org/drawingml/2006/chart" xmlns:a="http://schemas.openxmlformats.org/drawingml/2006/main" xmlns:r="http://schemas.openxmlformats.org/officeDocument/2006/relationships">
   <c:date1904 val="0"/>
   <c:roundedCorners val="1"/>
@@ -552,7 +1245,7 @@
           <c:dLbls>
             <c:numFmt formatCode="0.0%" sourceLinked="0"/>
             <c:txPr>
-              <a:bodyPr/>
+              <a:bodyPr wrap="none"/>
               <a:lstStyle/>
               <a:p>
                 <a:pPr>
@@ -641,7 +1334,7 @@
           <c:dLbls>
             <c:numFmt formatCode="0.0%" sourceLinked="0"/>
             <c:txPr>
-              <a:bodyPr/>
+              <a:bodyPr wrap="none"/>
               <a:lstStyle/>
               <a:p>
                 <a:pPr>
@@ -709,7 +1402,7 @@
         <c:dLbls>
           <c:numFmt formatCode="0.0%" sourceLinked="0"/>
           <c:txPr>
-            <a:bodyPr/>
+            <a:bodyPr wrap="none"/>
             <a:lstStyle/>
             <a:p>
               <a:pPr>
@@ -849,7 +1542,7 @@
 </c:chartSpace>
 </file>
 
-<file path=ppt/charts/chart3.xml><?xml version="1.0" encoding="utf-8"?>
+<file path=ppt/charts/chart6.xml><?xml version="1.0" encoding="utf-8"?>
 <c:chartSpace xmlns:c="http://schemas.openxmlformats.org/drawingml/2006/chart" xmlns:a="http://schemas.openxmlformats.org/drawingml/2006/main" xmlns:r="http://schemas.openxmlformats.org/officeDocument/2006/relationships">
   <c:date1904 val="0"/>
   <c:roundedCorners val="1"/>
@@ -885,7 +1578,7 @@
           <c:dLbls>
             <c:numFmt formatCode="#,##0" sourceLinked="0"/>
             <c:txPr>
-              <a:bodyPr/>
+              <a:bodyPr wrap="none"/>
               <a:lstStyle/>
               <a:p>
                 <a:pPr>
@@ -953,7 +1646,7 @@
         <c:dLbls>
           <c:numFmt formatCode="#,##0" sourceLinked="0"/>
           <c:txPr>
-            <a:bodyPr/>
+            <a:bodyPr wrap="none"/>
             <a:lstStyle/>
             <a:p>
               <a:pPr>
@@ -1675,6 +2368,94 @@
             <a:fld id="{F7021451-1387-4CA6-816F-3879F97B5CBC}" type="slidenum">
               <a:rPr lang="en-US"/>
               <a:t>11</a:t>
+            </a:fld>
+            <a:endParaRPr lang="en-US"/>
+          </a:p>
+        </p:txBody>
+      </p:sp>
+    </p:spTree>
+    <p:extLst>
+      <p:ext uri="{BB962C8B-B14F-4D97-AF65-F5344CB8AC3E}">
+        <p14:creationId xmlns:p14="http://schemas.microsoft.com/office/powerpoint/2010/main" val="1024086991"/>
+      </p:ext>
+    </p:extLst>
+  </p:cSld>
+  <p:clrMapOvr>
+    <a:masterClrMapping/>
+  </p:clrMapOvr>
+</p:notes>
+</file>
+
+<file path=ppt/notesSlides/notesSlide12.xml><?xml version="1.0" encoding="utf-8"?>
+<p:notes xmlns:a="http://schemas.openxmlformats.org/drawingml/2006/main" xmlns:r="http://schemas.openxmlformats.org/officeDocument/2006/relationships" xmlns:p="http://schemas.openxmlformats.org/presentationml/2006/main">
+  <p:cSld>
+    <p:spTree>
+      <p:nvGrpSpPr>
+        <p:cNvPr id="1" name=""/>
+        <p:cNvGrpSpPr/>
+        <p:nvPr/>
+      </p:nvGrpSpPr>
+      <p:grpSpPr>
+        <a:xfrm>
+          <a:off x="0" y="0"/>
+          <a:ext cx="0" cy="0"/>
+          <a:chOff x="0" y="0"/>
+          <a:chExt cx="0" cy="0"/>
+        </a:xfrm>
+      </p:grpSpPr>
+      <p:sp>
+        <p:nvSpPr>
+          <p:cNvPr id="2" name="Slide Image Placeholder 1"/>
+          <p:cNvSpPr>
+            <a:spLocks noGrp="1" noRot="1" noChangeAspect="1"/>
+          </p:cNvSpPr>
+          <p:nvPr>
+            <p:ph type="sldImg"/>
+          </p:nvPr>
+        </p:nvSpPr>
+        <p:spPr/>
+      </p:sp>
+      <p:sp>
+        <p:nvSpPr>
+          <p:cNvPr id="3" name="Notes Placeholder 2"/>
+          <p:cNvSpPr>
+            <a:spLocks noGrp="1"/>
+          </p:cNvSpPr>
+          <p:nvPr>
+            <p:ph type="body" idx="1"/>
+          </p:nvPr>
+        </p:nvSpPr>
+        <p:spPr/>
+        <p:txBody>
+          <a:bodyPr/>
+          <a:lstStyle/>
+          <a:p>
+            <a:r>
+              <a:rPr lang="en-US" dirty="0"/>
+              <a:t/>
+            </a:r>
+            <a:endParaRPr lang="en-US" dirty="0"/>
+          </a:p>
+        </p:txBody>
+      </p:sp>
+      <p:sp>
+        <p:nvSpPr>
+          <p:cNvPr id="4" name="Slide Number Placeholder 3"/>
+          <p:cNvSpPr>
+            <a:spLocks noGrp="1"/>
+          </p:cNvSpPr>
+          <p:nvPr>
+            <p:ph type="sldNum" sz="quarter" idx="10"/>
+          </p:nvPr>
+        </p:nvSpPr>
+        <p:spPr/>
+        <p:txBody>
+          <a:bodyPr/>
+          <a:lstStyle/>
+          <a:p>
+            <a:fld id="{F7021451-1387-4CA6-816F-3879F97B5CBC}" type="slidenum">
+              <a:rPr lang="en-US"/>
+              <a:t>12</a:t>
             </a:fld>
             <a:endParaRPr lang="en-US"/>
           </a:p>
@@ -3326,14 +4107,16 @@
       </p:grpSpPr>
       <p:sp>
         <p:nvSpPr>
-          <p:cNvPr id="2" name="texto-106"/>
-          <p:cNvSpPr txBox="1"/>
-          <p:nvPr/>
-        </p:nvSpPr>
-        <p:spPr>
-          <a:xfrm>
-            <a:off x="548640" y="1508760"/>
-            <a:ext cx="7315200" cy="320040"/>
+          <p:cNvPr id="2" name="Text 0"/>
+          <p:cNvSpPr/>
+          <p:nvPr>
+            <p:ph idx="102" type="body" hasCustomPrompt="1"/>
+          </p:nvPr>
+        </p:nvSpPr>
+        <p:spPr>
+          <a:xfrm>
+            <a:off x="548640" y="384048"/>
+            <a:ext cx="9144000" cy="292608"/>
           </a:xfrm>
           <a:prstGeom prst="rect">
             <a:avLst/>
@@ -3349,27 +4132,131 @@
               <a:buNone/>
             </a:pPr>
             <a:r>
-              <a:rPr lang="en-US" sz="1400" b="1" spc="100" kern="0" dirty="0">
-                <a:solidFill>
-                  <a:schemeClr val="accent3"/>
+              <a:rPr lang="en-US" sz="1200" b="1" spc="100" kern="0" dirty="0">
+                <a:solidFill>
+                  <a:schemeClr val="accent2"/>
                 </a:solidFill>
               </a:rPr>
-              <a:t>05 · CONCLUSÃO</a:t>
-            </a:r>
-            <a:endParaRPr lang="en-US" sz="1400" dirty="0"/>
-          </a:p>
-        </p:txBody>
-      </p:sp>
-      <p:sp>
-        <p:nvSpPr>
-          <p:cNvPr id="3" name="texto-107"/>
+              <a:t>04 · DUAS COLUNAS</a:t>
+            </a:r>
+            <a:endParaRPr lang="en-US" sz="1200" dirty="0"/>
+          </a:p>
+        </p:txBody>
+      </p:sp>
+      <p:sp>
+        <p:nvSpPr>
+          <p:cNvPr id="3" name="Text 0"/>
+          <p:cNvSpPr/>
+          <p:nvPr>
+            <p:ph idx="103" type="title" hasCustomPrompt="1"/>
+          </p:nvPr>
+        </p:nvSpPr>
+        <p:spPr>
+          <a:xfrm>
+            <a:off x="548640" y="713232"/>
+            <a:ext cx="11094415" cy="960120"/>
+          </a:xfrm>
+          <a:prstGeom prst="rect">
+            <a:avLst/>
+          </a:prstGeom>
+          <a:noFill/>
+          <a:ln/>
+        </p:spPr>
+        <p:txBody>
+          <a:bodyPr wrap="square" lIns="0" tIns="0" rIns="0" bIns="0" rtlCol="0" anchor="t"/>
+          <a:lstStyle/>
+          <a:p>
+            <a:pPr algn="l" indent="0" marL="0">
+              <a:buNone/>
+            </a:pPr>
+            <a:r>
+              <a:rPr lang="en-US" sz="2800" b="1" dirty="0">
+                <a:solidFill>
+                  <a:schemeClr val="accent1"/>
+                </a:solidFill>
+              </a:rPr>
+              <a:t>Duas colunas com listas, uma em destaque</a:t>
+            </a:r>
+            <a:endParaRPr lang="en-US" sz="2800" dirty="0"/>
+          </a:p>
+        </p:txBody>
+      </p:sp>
+      <p:sp>
+        <p:nvSpPr>
+          <p:cNvPr id="4" name="card-122"/>
+          <p:cNvSpPr/>
+          <p:nvPr/>
+        </p:nvSpPr>
+        <p:spPr>
+          <a:xfrm>
+            <a:off x="548640" y="2011680"/>
+            <a:ext cx="5410048" cy="4023360"/>
+          </a:xfrm>
+          <a:prstGeom prst="roundRect">
+            <a:avLst>
+              <a:gd name="adj" fmla="val 3636"/>
+            </a:avLst>
+          </a:prstGeom>
+          <a:solidFill>
+            <a:schemeClr val="bg2"/>
+          </a:solidFill>
+          <a:ln/>
+        </p:spPr>
+      </p:sp>
+      <p:sp>
+        <p:nvSpPr>
+          <p:cNvPr id="5" name="icone-fundo-123"/>
+          <p:cNvSpPr/>
+          <p:nvPr/>
+        </p:nvSpPr>
+        <p:spPr>
+          <a:xfrm>
+            <a:off x="914400" y="2331720"/>
+            <a:ext cx="640080" cy="640080"/>
+          </a:xfrm>
+          <a:prstGeom prst="ellipse">
+            <a:avLst/>
+          </a:prstGeom>
+          <a:solidFill>
+            <a:schemeClr val="accent1"/>
+          </a:solidFill>
+          <a:ln/>
+        </p:spPr>
+      </p:sp>
+      <p:pic>
+        <p:nvPicPr>
+          <p:cNvPr id="6" name="icone-124" descr="preencoded.png">    </p:cNvPr>
+          <p:cNvPicPr>
+            <a:picLocks noChangeAspect="1"/>
+          </p:cNvPicPr>
+          <p:nvPr/>
+        </p:nvPicPr>
+        <p:blipFill>
+          <a:blip r:embed="rId1"/>
+          <a:stretch>
+            <a:fillRect/>
+          </a:stretch>
+        </p:blipFill>
+        <p:spPr>
+          <a:xfrm>
+            <a:off x="1074420" y="2491740"/>
+            <a:ext cx="320040" cy="320040"/>
+          </a:xfrm>
+          <a:prstGeom prst="rect">
+            <a:avLst/>
+          </a:prstGeom>
+        </p:spPr>
+      </p:pic>
+      <p:sp>
+        <p:nvSpPr>
+          <p:cNvPr id="7" name="texto-125"/>
           <p:cNvSpPr txBox="1"/>
           <p:nvPr/>
         </p:nvSpPr>
         <p:spPr>
           <a:xfrm>
-            <a:off x="548640" y="1965960"/>
-            <a:ext cx="7863840" cy="2377440"/>
+            <a:off x="1783080" y="2331720"/>
+            <a:ext cx="3809848" cy="640080"/>
           </a:xfrm>
           <a:prstGeom prst="rect">
             <a:avLst/>
@@ -3378,79 +4265,302 @@
           <a:ln/>
         </p:spPr>
         <p:txBody>
-          <a:bodyPr wrap="square" lIns="0" tIns="0" rIns="0" bIns="0" rtlCol="0" anchor="t"/>
+          <a:bodyPr wrap="square" lIns="0" tIns="0" rIns="0" bIns="0" rtlCol="0" anchor="ctr"/>
           <a:lstStyle/>
           <a:p>
             <a:pPr indent="0" marL="0">
               <a:buNone/>
             </a:pPr>
             <a:r>
-              <a:rPr lang="en-US" sz="3400" b="1" dirty="0">
-                <a:solidFill>
-                  <a:schemeClr val="bg1"/>
+              <a:rPr lang="en-US" sz="1800" b="1" dirty="0">
+                <a:solidFill>
+                  <a:schemeClr val="accent1"/>
                 </a:solidFill>
               </a:rPr>
-              <a:t>A frase de conclusão cabe em até quatro linhas e destaca </a:t>
-            </a:r>
+              <a:t>Coluna informativa</a:t>
+            </a:r>
+            <a:endParaRPr lang="en-US" sz="1800" dirty="0"/>
+          </a:p>
+        </p:txBody>
+      </p:sp>
+      <p:sp>
+        <p:nvSpPr>
+          <p:cNvPr id="8" name="texto-126"/>
+          <p:cNvSpPr txBox="1"/>
+          <p:nvPr/>
+        </p:nvSpPr>
+        <p:spPr>
+          <a:xfrm>
+            <a:off x="914400" y="3154680"/>
+            <a:ext cx="4678528" cy="2651760"/>
+          </a:xfrm>
+          <a:prstGeom prst="rect">
+            <a:avLst/>
+          </a:prstGeom>
+          <a:noFill/>
+          <a:ln/>
+        </p:spPr>
+        <p:txBody>
+          <a:bodyPr wrap="square" lIns="0" tIns="0" rIns="0" bIns="0" rtlCol="0" anchor="t"/>
+          <a:lstStyle/>
+          <a:p>
+            <a:pPr marL="342900" indent="-342900">
+              <a:spcAft>
+                <a:spcPts val="800"/>
+              </a:spcAft>
+              <a:buSzPct val="100000"/>
+              <a:buChar char="•"/>
+            </a:pPr>
+            <a:r>
+              <a:rPr lang="en-US" sz="1400" dirty="0">
+                <a:solidFill>
+                  <a:schemeClr val="tx1"/>
+                </a:solidFill>
+              </a:rPr>
+              <a:t>Primeiro ponto da lista.</a:t>
+            </a:r>
+            <a:endParaRPr lang="en-US" sz="1400" dirty="0"/>
+          </a:p>
+          <a:p>
+            <a:pPr marL="342900" indent="-342900">
+              <a:spcAft>
+                <a:spcPts val="800"/>
+              </a:spcAft>
+              <a:buSzPct val="100000"/>
+              <a:buChar char="•"/>
+            </a:pPr>
+            <a:r>
+              <a:rPr lang="en-US" sz="1400" dirty="0">
+                <a:solidFill>
+                  <a:schemeClr val="tx1"/>
+                </a:solidFill>
+              </a:rPr>
+              <a:t>Segundo ponto da lista.</a:t>
+            </a:r>
+            <a:endParaRPr lang="en-US" sz="1400" dirty="0"/>
+          </a:p>
+          <a:p>
+            <a:pPr marL="342900" indent="-342900">
+              <a:spcAft>
+                <a:spcPts val="800"/>
+              </a:spcAft>
+              <a:buSzPct val="100000"/>
+              <a:buChar char="•"/>
+            </a:pPr>
+            <a:r>
+              <a:rPr lang="en-US" sz="1400" dirty="0">
+                <a:solidFill>
+                  <a:schemeClr val="tx1"/>
+                </a:solidFill>
+              </a:rPr>
+              <a:t>Terceiro ponto da lista.</a:t>
+            </a:r>
+            <a:endParaRPr lang="en-US" sz="1400" dirty="0"/>
+          </a:p>
+        </p:txBody>
+      </p:sp>
+      <p:sp>
+        <p:nvSpPr>
+          <p:cNvPr id="9" name="card-127"/>
+          <p:cNvSpPr/>
+          <p:nvPr/>
+        </p:nvSpPr>
+        <p:spPr>
+          <a:xfrm>
+            <a:off x="6233008" y="2011680"/>
+            <a:ext cx="5410048" cy="4023360"/>
+          </a:xfrm>
+          <a:prstGeom prst="roundRect">
+            <a:avLst>
+              <a:gd name="adj" fmla="val 3636"/>
+            </a:avLst>
+          </a:prstGeom>
+          <a:solidFill>
+            <a:schemeClr val="accent1"/>
+          </a:solidFill>
+          <a:ln/>
+        </p:spPr>
+      </p:sp>
+      <p:sp>
+        <p:nvSpPr>
+          <p:cNvPr id="10" name="icone-fundo-128"/>
+          <p:cNvSpPr/>
+          <p:nvPr/>
+        </p:nvSpPr>
+        <p:spPr>
+          <a:xfrm>
+            <a:off x="6598768" y="2331720"/>
+            <a:ext cx="640080" cy="640080"/>
+          </a:xfrm>
+          <a:prstGeom prst="ellipse">
+            <a:avLst/>
+          </a:prstGeom>
+          <a:solidFill>
+            <a:schemeClr val="accent2"/>
+          </a:solidFill>
+          <a:ln/>
+        </p:spPr>
+      </p:sp>
+      <p:pic>
+        <p:nvPicPr>
+          <p:cNvPr id="11" name="icone-129" descr="preencoded.png">    </p:cNvPr>
+          <p:cNvPicPr>
+            <a:picLocks noChangeAspect="1"/>
+          </p:cNvPicPr>
+          <p:nvPr/>
+        </p:nvPicPr>
+        <p:blipFill>
+          <a:blip r:embed="rId2"/>
+          <a:stretch>
+            <a:fillRect/>
+          </a:stretch>
+        </p:blipFill>
+        <p:spPr>
+          <a:xfrm>
+            <a:off x="6758788" y="2491740"/>
+            <a:ext cx="320040" cy="320040"/>
+          </a:xfrm>
+          <a:prstGeom prst="rect">
+            <a:avLst/>
+          </a:prstGeom>
+        </p:spPr>
+      </p:pic>
+      <p:sp>
+        <p:nvSpPr>
+          <p:cNvPr id="12" name="texto-130"/>
+          <p:cNvSpPr txBox="1"/>
+          <p:nvPr/>
+        </p:nvSpPr>
+        <p:spPr>
+          <a:xfrm>
+            <a:off x="7467448" y="2331720"/>
+            <a:ext cx="3809848" cy="640080"/>
+          </a:xfrm>
+          <a:prstGeom prst="rect">
+            <a:avLst/>
+          </a:prstGeom>
+          <a:noFill/>
+          <a:ln/>
+        </p:spPr>
+        <p:txBody>
+          <a:bodyPr wrap="square" lIns="0" tIns="0" rIns="0" bIns="0" rtlCol="0" anchor="ctr"/>
+          <a:lstStyle/>
+          <a:p>
             <a:pPr indent="0" marL="0">
               <a:buNone/>
             </a:pPr>
             <a:r>
-              <a:rPr lang="en-US" sz="3400" b="1" dirty="0">
-                <a:solidFill>
-                  <a:schemeClr val="accent3"/>
+              <a:rPr lang="en-US" sz="1800" b="1" dirty="0">
+                <a:solidFill>
+                  <a:schemeClr val="bg1"/>
                 </a:solidFill>
               </a:rPr>
-              <a:t>o número que importa</a:t>
-            </a:r>
-            <a:pPr indent="0" marL="0">
-              <a:buNone/>
-            </a:pPr>
-            <a:r>
-              <a:rPr lang="en-US" sz="3400" b="1" dirty="0">
+              <a:t>Coluna em destaque</a:t>
+            </a:r>
+            <a:endParaRPr lang="en-US" sz="1800" dirty="0"/>
+          </a:p>
+        </p:txBody>
+      </p:sp>
+      <p:sp>
+        <p:nvSpPr>
+          <p:cNvPr id="13" name="texto-131"/>
+          <p:cNvSpPr txBox="1"/>
+          <p:nvPr/>
+        </p:nvSpPr>
+        <p:spPr>
+          <a:xfrm>
+            <a:off x="6598768" y="3154680"/>
+            <a:ext cx="4678528" cy="2651760"/>
+          </a:xfrm>
+          <a:prstGeom prst="rect">
+            <a:avLst/>
+          </a:prstGeom>
+          <a:noFill/>
+          <a:ln/>
+        </p:spPr>
+        <p:txBody>
+          <a:bodyPr wrap="square" lIns="0" tIns="0" rIns="0" bIns="0" rtlCol="0" anchor="t"/>
+          <a:lstStyle/>
+          <a:p>
+            <a:pPr marL="342900" indent="-342900">
+              <a:spcAft>
+                <a:spcPts val="800"/>
+              </a:spcAft>
+              <a:buSzPct val="100000"/>
+              <a:buChar char="•"/>
+            </a:pPr>
+            <a:r>
+              <a:rPr lang="en-US" sz="1400" dirty="0">
                 <a:solidFill>
                   <a:schemeClr val="bg1"/>
                 </a:solidFill>
               </a:rPr>
-              <a:t>.</a:t>
-            </a:r>
-            <a:endParaRPr lang="en-US" sz="3400" dirty="0"/>
-          </a:p>
-        </p:txBody>
-      </p:sp>
-      <p:sp>
-        <p:nvSpPr>
-          <p:cNvPr id="4" name="texto-108"/>
-          <p:cNvSpPr txBox="1"/>
-          <p:nvPr/>
-        </p:nvSpPr>
-        <p:spPr>
-          <a:xfrm>
-            <a:off x="548640" y="4526280"/>
-            <a:ext cx="7498080" cy="1005840"/>
-          </a:xfrm>
-          <a:prstGeom prst="rect">
-            <a:avLst/>
-          </a:prstGeom>
-          <a:noFill/>
-          <a:ln/>
-        </p:spPr>
-        <p:txBody>
-          <a:bodyPr wrap="square" lIns="0" tIns="0" rIns="0" bIns="0" rtlCol="0" anchor="t"/>
-          <a:lstStyle/>
-          <a:p>
-            <a:pPr indent="0" marL="0">
-              <a:buNone/>
-            </a:pPr>
-            <a:r>
-              <a:rPr lang="en-US" sz="1700" dirty="0">
+              <a:t>Primeiro ponto da lista.</a:t>
+            </a:r>
+            <a:endParaRPr lang="en-US" sz="1400" dirty="0"/>
+          </a:p>
+          <a:p>
+            <a:pPr marL="342900" indent="-342900">
+              <a:spcAft>
+                <a:spcPts val="800"/>
+              </a:spcAft>
+              <a:buSzPct val="100000"/>
+              <a:buChar char="•"/>
+            </a:pPr>
+            <a:r>
+              <a:rPr lang="en-US" sz="1400" dirty="0">
                 <a:solidFill>
                   <a:schemeClr val="bg1"/>
                 </a:solidFill>
               </a:rPr>
-              <a:t>Parágrafo de apoio com a consequência ou o próximo passo.</a:t>
-            </a:r>
-            <a:endParaRPr lang="en-US" sz="1700" dirty="0"/>
+              <a:t>Segundo ponto da lista.</a:t>
+            </a:r>
+            <a:endParaRPr lang="en-US" sz="1400" dirty="0"/>
+          </a:p>
+        </p:txBody>
+      </p:sp>
+      <p:sp>
+        <p:nvSpPr>
+          <p:cNvPr id="25" name="Slide Number Placeholder 0"/>
+          <p:cNvSpPr>
+            <a:spLocks noGrp="1"/>
+          </p:cNvSpPr>
+          <p:nvPr>
+            <p:ph type="sldNum" sz="quarter" idx="4294967295"/>
+          </p:nvPr>
+        </p:nvSpPr>
+        <p:spPr>
+          <a:xfrm>
+            <a:off x="10561320" y="6291072"/>
+            <a:ext cx="548640" cy="274320"/>
+          </a:xfrm>
+          <a:prstGeom prst="rect">
+            <a:avLst/>
+          </a:prstGeom>
+          <a:extLst>
+            <a:ext uri="{C572A759-6A51-4108-AA02-DFA0A04FC94B}">
+              <ma14:wrappingTextBoxFlag xmlns:ma14="http://schemas.microsoft.com/office/mac/drawingml/2011/main" val="0"/>
+            </a:ext>
+          </a:extLst>
+        </p:spPr>
+        <p:txBody>
+          <a:bodyPr/>
+          <a:lstStyle>
+            <a:lvl1pPr>
+              <a:defRPr sz="1000">
+                <a:solidFill>
+                  <a:schemeClr val="accent6"/>
+                </a:solidFill>
+              </a:defRPr>
+            </a:lvl1pPr>
+          </a:lstStyle>
+          <a:p>
+            <a:pPr algn="r"/>
+            <a:fld id="{F7021451-1387-4CA6-816F-3879F97B5CBC}" type="slidenum">
+              <a:rPr b="0" lang="en-US"/>
+              <a:t>10</a:t>
+            </a:fld>
+            <a:endParaRPr lang="en-US"/>
           </a:p>
         </p:txBody>
       </p:sp>
@@ -3481,7 +4591,162 @@
       </p:grpSpPr>
       <p:sp>
         <p:nvSpPr>
-          <p:cNvPr id="2" name="texto-109"/>
+          <p:cNvPr id="2" name="texto-132"/>
+          <p:cNvSpPr txBox="1"/>
+          <p:nvPr/>
+        </p:nvSpPr>
+        <p:spPr>
+          <a:xfrm>
+            <a:off x="548640" y="1508760"/>
+            <a:ext cx="7315200" cy="320040"/>
+          </a:xfrm>
+          <a:prstGeom prst="rect">
+            <a:avLst/>
+          </a:prstGeom>
+          <a:noFill/>
+          <a:ln/>
+        </p:spPr>
+        <p:txBody>
+          <a:bodyPr wrap="square" lIns="0" tIns="0" rIns="0" bIns="0" rtlCol="0" anchor="ctr"/>
+          <a:lstStyle/>
+          <a:p>
+            <a:pPr indent="0" marL="0">
+              <a:buNone/>
+            </a:pPr>
+            <a:r>
+              <a:rPr lang="en-US" sz="1400" b="1" spc="100" kern="0" dirty="0">
+                <a:solidFill>
+                  <a:schemeClr val="accent3"/>
+                </a:solidFill>
+              </a:rPr>
+              <a:t>05 · CONCLUSÃO</a:t>
+            </a:r>
+            <a:endParaRPr lang="en-US" sz="1400" dirty="0"/>
+          </a:p>
+        </p:txBody>
+      </p:sp>
+      <p:sp>
+        <p:nvSpPr>
+          <p:cNvPr id="3" name="texto-133"/>
+          <p:cNvSpPr txBox="1"/>
+          <p:nvPr/>
+        </p:nvSpPr>
+        <p:spPr>
+          <a:xfrm>
+            <a:off x="548640" y="1965960"/>
+            <a:ext cx="7863840" cy="2377440"/>
+          </a:xfrm>
+          <a:prstGeom prst="rect">
+            <a:avLst/>
+          </a:prstGeom>
+          <a:noFill/>
+          <a:ln/>
+        </p:spPr>
+        <p:txBody>
+          <a:bodyPr wrap="square" lIns="0" tIns="0" rIns="0" bIns="0" rtlCol="0" anchor="t"/>
+          <a:lstStyle/>
+          <a:p>
+            <a:pPr indent="0" marL="0">
+              <a:buNone/>
+            </a:pPr>
+            <a:r>
+              <a:rPr lang="en-US" sz="3400" b="1" dirty="0">
+                <a:solidFill>
+                  <a:schemeClr val="bg1"/>
+                </a:solidFill>
+              </a:rPr>
+              <a:t>A frase de conclusão cabe em até quatro linhas e destaca </a:t>
+            </a:r>
+            <a:pPr indent="0" marL="0">
+              <a:buNone/>
+            </a:pPr>
+            <a:r>
+              <a:rPr lang="en-US" sz="3400" b="1" dirty="0">
+                <a:solidFill>
+                  <a:schemeClr val="accent3"/>
+                </a:solidFill>
+              </a:rPr>
+              <a:t>o número que importa</a:t>
+            </a:r>
+            <a:pPr indent="0" marL="0">
+              <a:buNone/>
+            </a:pPr>
+            <a:r>
+              <a:rPr lang="en-US" sz="3400" b="1" dirty="0">
+                <a:solidFill>
+                  <a:schemeClr val="bg1"/>
+                </a:solidFill>
+              </a:rPr>
+              <a:t>.</a:t>
+            </a:r>
+            <a:endParaRPr lang="en-US" sz="3400" dirty="0"/>
+          </a:p>
+        </p:txBody>
+      </p:sp>
+      <p:sp>
+        <p:nvSpPr>
+          <p:cNvPr id="4" name="texto-134"/>
+          <p:cNvSpPr txBox="1"/>
+          <p:nvPr/>
+        </p:nvSpPr>
+        <p:spPr>
+          <a:xfrm>
+            <a:off x="548640" y="4526280"/>
+            <a:ext cx="7498080" cy="1005840"/>
+          </a:xfrm>
+          <a:prstGeom prst="rect">
+            <a:avLst/>
+          </a:prstGeom>
+          <a:noFill/>
+          <a:ln/>
+        </p:spPr>
+        <p:txBody>
+          <a:bodyPr wrap="square" lIns="0" tIns="0" rIns="0" bIns="0" rtlCol="0" anchor="t"/>
+          <a:lstStyle/>
+          <a:p>
+            <a:pPr indent="0" marL="0">
+              <a:buNone/>
+            </a:pPr>
+            <a:r>
+              <a:rPr lang="en-US" sz="1700" dirty="0">
+                <a:solidFill>
+                  <a:schemeClr val="bg1"/>
+                </a:solidFill>
+              </a:rPr>
+              <a:t>Parágrafo de apoio com a consequência ou o próximo passo.</a:t>
+            </a:r>
+            <a:endParaRPr lang="en-US" sz="1700" dirty="0"/>
+          </a:p>
+        </p:txBody>
+      </p:sp>
+    </p:spTree>
+  </p:cSld>
+  <p:clrMapOvr>
+    <a:masterClrMapping/>
+  </p:clrMapOvr>
+</p:sld>
+</file>
+
+<file path=ppt/slides/slide12.xml><?xml version="1.0" encoding="utf-8"?>
+<p:sld xmlns:a="http://schemas.openxmlformats.org/drawingml/2006/main" xmlns:r="http://schemas.openxmlformats.org/officeDocument/2006/relationships" xmlns:p="http://schemas.openxmlformats.org/presentationml/2006/main">
+  <p:cSld name="Slide 12">
+    <p:spTree>
+      <p:nvGrpSpPr>
+        <p:cNvPr id="1" name=""/>
+        <p:cNvGrpSpPr/>
+        <p:nvPr/>
+      </p:nvGrpSpPr>
+      <p:grpSpPr>
+        <a:xfrm>
+          <a:off x="0" y="0"/>
+          <a:ext cx="0" cy="0"/>
+          <a:chOff x="0" y="0"/>
+          <a:chExt cx="0" cy="0"/>
+        </a:xfrm>
+      </p:grpSpPr>
+      <p:sp>
+        <p:nvSpPr>
+          <p:cNvPr id="2" name="texto-135"/>
           <p:cNvSpPr txBox="1"/>
           <p:nvPr/>
         </p:nvSpPr>
@@ -3517,7 +4782,7 @@
       </p:sp>
       <p:sp>
         <p:nvSpPr>
-          <p:cNvPr id="3" name="texto-110"/>
+          <p:cNvPr id="3" name="texto-136"/>
           <p:cNvSpPr txBox="1"/>
           <p:nvPr/>
         </p:nvSpPr>
@@ -4276,7 +5541,7 @@
                   <a:schemeClr val="accent2"/>
                 </a:solidFill>
               </a:rPr>
-              <a:t>02 · COMPARAÇÃO</a:t>
+              <a:t>01 · SÍNTESE EM GRÁFICOS</a:t>
             </a:r>
             <a:endParaRPr lang="en-US" sz="1200" dirty="0"/>
           </a:p>
@@ -4314,7 +5579,7 @@
                   <a:schemeClr val="accent1"/>
                 </a:solidFill>
               </a:rPr>
-              <a:t>Comparação entre dois grupos com selo de destaque</a:t>
+              <a:t>A mesma síntese com gráficos no lugar dos números</a:t>
             </a:r>
             <a:endParaRPr lang="en-US" sz="2800" dirty="0"/>
           </a:p>
@@ -4329,174 +5594,11 @@
         <p:spPr>
           <a:xfrm>
             <a:off x="548640" y="2011680"/>
-            <a:ext cx="11094415" cy="2331720"/>
+            <a:ext cx="3515258" cy="4023360"/>
           </a:xfrm>
           <a:prstGeom prst="roundRect">
             <a:avLst>
-              <a:gd name="adj" fmla="val 6275"/>
-            </a:avLst>
-          </a:prstGeom>
-          <a:solidFill>
-            <a:schemeClr val="bg2"/>
-          </a:solidFill>
-          <a:ln/>
-        </p:spPr>
-      </p:sp>
-      <p:sp>
-        <p:nvSpPr>
-          <p:cNvPr id="5" name="texto-26"/>
-          <p:cNvSpPr txBox="1"/>
-          <p:nvPr/>
-        </p:nvSpPr>
-        <p:spPr>
-          <a:xfrm>
-            <a:off x="914400" y="2377440"/>
-            <a:ext cx="1920240" cy="685800"/>
-          </a:xfrm>
-          <a:prstGeom prst="rect">
-            <a:avLst/>
-          </a:prstGeom>
-          <a:noFill/>
-          <a:ln/>
-        </p:spPr>
-        <p:txBody>
-          <a:bodyPr wrap="square" lIns="0" tIns="0" rIns="0" bIns="0" rtlCol="0" anchor="ctr"/>
-          <a:lstStyle/>
-          <a:p>
-            <a:pPr indent="0" marL="0">
-              <a:buNone/>
-            </a:pPr>
-            <a:r>
-              <a:rPr lang="en-US" sz="1600" b="1" dirty="0">
-                <a:solidFill>
-                  <a:schemeClr val="tx1"/>
-                </a:solidFill>
-              </a:rPr>
-              <a:t>Grupo A</a:t>
-            </a:r>
-            <a:endParaRPr lang="en-US" sz="1600" dirty="0"/>
-          </a:p>
-        </p:txBody>
-      </p:sp>
-      <p:sp>
-        <p:nvSpPr>
-          <p:cNvPr id="6" name="barra-27"/>
-          <p:cNvSpPr/>
-          <p:nvPr/>
-        </p:nvSpPr>
-        <p:spPr>
-          <a:xfrm>
-            <a:off x="2926080" y="2423160"/>
-            <a:ext cx="2359742" cy="594360"/>
-          </a:xfrm>
-          <a:prstGeom prst="roundRect">
-            <a:avLst>
-              <a:gd name="adj" fmla="val 18462"/>
-            </a:avLst>
-          </a:prstGeom>
-          <a:solidFill>
-            <a:schemeClr val="accent3"/>
-          </a:solidFill>
-          <a:ln/>
-        </p:spPr>
-      </p:sp>
-      <p:sp>
-        <p:nvSpPr>
-          <p:cNvPr id="7" name="texto-28"/>
-          <p:cNvSpPr txBox="1"/>
-          <p:nvPr/>
-        </p:nvSpPr>
-        <p:spPr>
-          <a:xfrm>
-            <a:off x="5468702" y="2377440"/>
-            <a:ext cx="3840480" cy="685800"/>
-          </a:xfrm>
-          <a:prstGeom prst="rect">
-            <a:avLst/>
-          </a:prstGeom>
-          <a:noFill/>
-          <a:ln/>
-        </p:spPr>
-        <p:txBody>
-          <a:bodyPr wrap="square" lIns="0" tIns="0" rIns="0" bIns="0" rtlCol="0" anchor="ctr"/>
-          <a:lstStyle/>
-          <a:p>
-            <a:pPr indent="0" marL="0">
-              <a:buNone/>
-            </a:pPr>
-            <a:r>
-              <a:rPr lang="en-US" sz="3200" b="1" dirty="0">
-                <a:solidFill>
-                  <a:schemeClr val="accent1"/>
-                </a:solidFill>
-              </a:rPr>
-              <a:t>25%</a:t>
-            </a:r>
-            <a:pPr indent="0" marL="0">
-              <a:buNone/>
-            </a:pPr>
-            <a:r>
-              <a:rPr lang="en-US" sz="1300" dirty="0">
-                <a:solidFill>
-                  <a:schemeClr val="accent6"/>
-                </a:solidFill>
-              </a:rPr>
-              <a:t>   100 de 400</a:t>
-            </a:r>
-            <a:endParaRPr lang="en-US" sz="3200" dirty="0"/>
-          </a:p>
-        </p:txBody>
-      </p:sp>
-      <p:sp>
-        <p:nvSpPr>
-          <p:cNvPr id="8" name="texto-29"/>
-          <p:cNvSpPr txBox="1"/>
-          <p:nvPr/>
-        </p:nvSpPr>
-        <p:spPr>
-          <a:xfrm>
-            <a:off x="914400" y="3291840"/>
-            <a:ext cx="1920240" cy="685800"/>
-          </a:xfrm>
-          <a:prstGeom prst="rect">
-            <a:avLst/>
-          </a:prstGeom>
-          <a:noFill/>
-          <a:ln/>
-        </p:spPr>
-        <p:txBody>
-          <a:bodyPr wrap="square" lIns="0" tIns="0" rIns="0" bIns="0" rtlCol="0" anchor="ctr"/>
-          <a:lstStyle/>
-          <a:p>
-            <a:pPr indent="0" marL="0">
-              <a:buNone/>
-            </a:pPr>
-            <a:r>
-              <a:rPr lang="en-US" sz="1600" b="1" dirty="0">
-                <a:solidFill>
-                  <a:schemeClr val="tx1"/>
-                </a:solidFill>
-              </a:rPr>
-              <a:t>Grupo B</a:t>
-            </a:r>
-            <a:endParaRPr lang="en-US" sz="1600" dirty="0"/>
-          </a:p>
-        </p:txBody>
-      </p:sp>
-      <p:sp>
-        <p:nvSpPr>
-          <p:cNvPr id="9" name="barra-30"/>
-          <p:cNvSpPr/>
-          <p:nvPr/>
-        </p:nvSpPr>
-        <p:spPr>
-          <a:xfrm>
-            <a:off x="2926080" y="3337560"/>
-            <a:ext cx="5852160" cy="594360"/>
-          </a:xfrm>
-          <a:prstGeom prst="roundRect">
-            <a:avLst>
-              <a:gd name="adj" fmla="val 18462"/>
+              <a:gd name="adj" fmla="val 4162"/>
             </a:avLst>
           </a:prstGeom>
           <a:solidFill>
@@ -4507,202 +5609,27 @@
       </p:sp>
       <p:sp>
         <p:nvSpPr>
-          <p:cNvPr id="10" name="texto-31"/>
-          <p:cNvSpPr txBox="1"/>
-          <p:nvPr/>
-        </p:nvSpPr>
-        <p:spPr>
-          <a:xfrm>
-            <a:off x="8961120" y="3291840"/>
-            <a:ext cx="3840480" cy="685800"/>
-          </a:xfrm>
-          <a:prstGeom prst="rect">
-            <a:avLst/>
-          </a:prstGeom>
-          <a:noFill/>
-          <a:ln/>
-        </p:spPr>
-        <p:txBody>
-          <a:bodyPr wrap="square" lIns="0" tIns="0" rIns="0" bIns="0" rtlCol="0" anchor="ctr"/>
-          <a:lstStyle/>
-          <a:p>
-            <a:pPr indent="0" marL="0">
-              <a:buNone/>
-            </a:pPr>
-            <a:r>
-              <a:rPr lang="en-US" sz="3200" b="1" dirty="0">
-                <a:solidFill>
-                  <a:schemeClr val="accent1"/>
-                </a:solidFill>
-              </a:rPr>
-              <a:t>62%</a:t>
-            </a:r>
-            <a:pPr indent="0" marL="0">
-              <a:buNone/>
-            </a:pPr>
-            <a:r>
-              <a:rPr lang="en-US" sz="1300" dirty="0">
-                <a:solidFill>
-                  <a:schemeClr val="accent6"/>
-                </a:solidFill>
-              </a:rPr>
-              <a:t>   124 de 200</a:t>
-            </a:r>
-            <a:endParaRPr lang="en-US" sz="3200" dirty="0"/>
-          </a:p>
-        </p:txBody>
-      </p:sp>
-      <p:sp>
-        <p:nvSpPr>
-          <p:cNvPr id="11" name="selo-32"/>
+          <p:cNvPr id="5" name="icone-fundo-26"/>
           <p:cNvSpPr/>
           <p:nvPr/>
         </p:nvSpPr>
         <p:spPr>
           <a:xfrm>
-            <a:off x="10134295" y="2423160"/>
-            <a:ext cx="1188720" cy="1188720"/>
+            <a:off x="914400" y="2377440"/>
+            <a:ext cx="640080" cy="640080"/>
           </a:xfrm>
           <a:prstGeom prst="ellipse">
             <a:avLst/>
           </a:prstGeom>
           <a:solidFill>
-            <a:schemeClr val="accent4"/>
-          </a:solidFill>
-          <a:ln/>
-        </p:spPr>
-      </p:sp>
-      <p:sp>
-        <p:nvSpPr>
-          <p:cNvPr id="12" name="texto-33"/>
-          <p:cNvSpPr txBox="1"/>
-          <p:nvPr/>
-        </p:nvSpPr>
-        <p:spPr>
-          <a:xfrm>
-            <a:off x="10134295" y="2423160"/>
-            <a:ext cx="1188720" cy="1188720"/>
-          </a:xfrm>
-          <a:prstGeom prst="rect">
-            <a:avLst/>
-          </a:prstGeom>
-          <a:noFill/>
-          <a:ln/>
-        </p:spPr>
-        <p:txBody>
-          <a:bodyPr wrap="square" lIns="0" tIns="0" rIns="0" bIns="0" rtlCol="0" anchor="ctr"/>
-          <a:lstStyle/>
-          <a:p>
-            <a:pPr algn="ctr" indent="0" marL="0">
-              <a:buNone/>
-            </a:pPr>
-            <a:r>
-              <a:rPr lang="en-US" sz="2600" b="1" dirty="0">
-                <a:solidFill>
-                  <a:schemeClr val="bg1"/>
-                </a:solidFill>
-              </a:rPr>
-              <a:t>2,5×</a:t>
-            </a:r>
-            <a:endParaRPr lang="en-US" sz="2600" dirty="0"/>
-          </a:p>
-          <a:p>
-            <a:pPr algn="ctr" indent="0" marL="0">
-              <a:buNone/>
-            </a:pPr>
-            <a:r>
-              <a:rPr lang="en-US" sz="1100" dirty="0">
-                <a:solidFill>
-                  <a:schemeClr val="bg1"/>
-                </a:solidFill>
-              </a:rPr>
-              <a:t>maior</a:t>
-            </a:r>
-            <a:endParaRPr lang="en-US" sz="2600" dirty="0"/>
-          </a:p>
-        </p:txBody>
-      </p:sp>
-      <p:sp>
-        <p:nvSpPr>
-          <p:cNvPr id="13" name="texto-34"/>
-          <p:cNvSpPr txBox="1"/>
-          <p:nvPr/>
-        </p:nvSpPr>
-        <p:spPr>
-          <a:xfrm>
-            <a:off x="914400" y="3931920"/>
-            <a:ext cx="10362895" cy="274320"/>
-          </a:xfrm>
-          <a:prstGeom prst="rect">
-            <a:avLst/>
-          </a:prstGeom>
-          <a:noFill/>
-          <a:ln/>
-        </p:spPr>
-        <p:txBody>
-          <a:bodyPr wrap="square" lIns="0" tIns="0" rIns="0" bIns="0" rtlCol="0" anchor="ctr"/>
-          <a:lstStyle/>
-          <a:p>
-            <a:pPr indent="0" marL="0">
-              <a:buNone/>
-            </a:pPr>
-            <a:r>
-              <a:rPr lang="en-US" sz="1100" i="1" dirty="0">
-                <a:solidFill>
-                  <a:schemeClr val="accent6"/>
-                </a:solidFill>
-              </a:rPr>
-              <a:t>Definição do indicador em uma linha</a:t>
-            </a:r>
-            <a:endParaRPr lang="en-US" sz="1100" dirty="0"/>
-          </a:p>
-        </p:txBody>
-      </p:sp>
-      <p:sp>
-        <p:nvSpPr>
-          <p:cNvPr id="14" name="card-35"/>
-          <p:cNvSpPr/>
-          <p:nvPr/>
-        </p:nvSpPr>
-        <p:spPr>
-          <a:xfrm>
-            <a:off x="548640" y="4617720"/>
-            <a:ext cx="5410048" cy="1417320"/>
-          </a:xfrm>
-          <a:prstGeom prst="roundRect">
-            <a:avLst>
-              <a:gd name="adj" fmla="val 10323"/>
-            </a:avLst>
-          </a:prstGeom>
-          <a:solidFill>
-            <a:schemeClr val="bg2"/>
-          </a:solidFill>
-          <a:ln/>
-        </p:spPr>
-      </p:sp>
-      <p:sp>
-        <p:nvSpPr>
-          <p:cNvPr id="15" name="icone-fundo-36"/>
-          <p:cNvSpPr/>
-          <p:nvPr/>
-        </p:nvSpPr>
-        <p:spPr>
-          <a:xfrm>
-            <a:off x="914400" y="4892040"/>
-            <a:ext cx="548640" cy="548640"/>
-          </a:xfrm>
-          <a:prstGeom prst="ellipse">
-            <a:avLst/>
-          </a:prstGeom>
-          <a:solidFill>
-            <a:schemeClr val="accent1"/>
+            <a:schemeClr val="accent2"/>
           </a:solidFill>
           <a:ln/>
         </p:spPr>
       </p:sp>
       <p:pic>
         <p:nvPicPr>
-          <p:cNvPr id="16" name="icone-37" descr="preencoded.png">    </p:cNvPr>
+          <p:cNvPr id="6" name="icone-27" descr="preencoded.png">    </p:cNvPr>
           <p:cNvPicPr>
             <a:picLocks noChangeAspect="1"/>
           </p:cNvPicPr>
@@ -4716,8 +5643,8 @@
         </p:blipFill>
         <p:spPr>
           <a:xfrm>
-            <a:off x="1051560" y="5029200"/>
-            <a:ext cx="274320" cy="274320"/>
+            <a:off x="1074420" y="2537460"/>
+            <a:ext cx="320040" cy="320040"/>
           </a:xfrm>
           <a:prstGeom prst="rect">
             <a:avLst/>
@@ -4726,14 +5653,14 @@
       </p:pic>
       <p:sp>
         <p:nvSpPr>
-          <p:cNvPr id="17" name="texto-38"/>
+          <p:cNvPr id="7" name="texto-28"/>
           <p:cNvSpPr txBox="1"/>
           <p:nvPr/>
         </p:nvSpPr>
         <p:spPr>
           <a:xfrm>
-            <a:off x="1783080" y="4892040"/>
-            <a:ext cx="3809848" cy="365760"/>
+            <a:off x="1737360" y="2377440"/>
+            <a:ext cx="2052218" cy="640080"/>
           </a:xfrm>
           <a:prstGeom prst="rect">
             <a:avLst/>
@@ -4749,67 +5676,131 @@
               <a:buNone/>
             </a:pPr>
             <a:r>
-              <a:rPr lang="en-US" sz="1600" b="1" dirty="0">
-                <a:solidFill>
-                  <a:schemeClr val="accent1"/>
+              <a:rPr lang="en-US" sz="1800" b="1" dirty="0">
+                <a:solidFill>
+                  <a:schemeClr val="bg1"/>
                 </a:solidFill>
               </a:rPr>
-              <a:t>Critério alternativo</a:t>
-            </a:r>
-            <a:endParaRPr lang="en-US" sz="1600" dirty="0"/>
-          </a:p>
-        </p:txBody>
-      </p:sp>
-      <p:sp>
-        <p:nvSpPr>
-          <p:cNvPr id="18" name="texto-39"/>
-          <p:cNvSpPr txBox="1"/>
-          <p:nvPr/>
-        </p:nvSpPr>
-        <p:spPr>
-          <a:xfrm>
-            <a:off x="1783080" y="5276088"/>
-            <a:ext cx="3809848" cy="594360"/>
-          </a:xfrm>
-          <a:prstGeom prst="rect">
-            <a:avLst/>
-          </a:prstGeom>
-          <a:noFill/>
-          <a:ln/>
-        </p:spPr>
-        <p:txBody>
-          <a:bodyPr wrap="square" lIns="0" tIns="0" rIns="0" bIns="0" rtlCol="0" anchor="t"/>
-          <a:lstStyle/>
+              <a:t>Taxa de conversão</a:t>
+            </a:r>
+            <a:endParaRPr lang="en-US" sz="1800" dirty="0"/>
+          </a:p>
           <a:p>
             <a:pPr indent="0" marL="0">
               <a:buNone/>
             </a:pPr>
             <a:r>
-              <a:rPr lang="en-US" sz="1400" dirty="0">
-                <a:solidFill>
-                  <a:schemeClr val="tx1"/>
+              <a:rPr lang="en-US" sz="1200" dirty="0">
+                <a:solidFill>
+                  <a:schemeClr val="accent3"/>
                 </a:solidFill>
               </a:rPr>
-              <a:t>Quando a métrica muda de definição, o resultado se mantém.</a:t>
-            </a:r>
-            <a:endParaRPr lang="en-US" sz="1400" dirty="0"/>
-          </a:p>
-        </p:txBody>
-      </p:sp>
-      <p:sp>
-        <p:nvSpPr>
-          <p:cNvPr id="19" name="card-40"/>
+              <a:t>acumulado do ano</a:t>
+            </a:r>
+            <a:endParaRPr lang="en-US" sz="1800" dirty="0"/>
+          </a:p>
+        </p:txBody>
+      </p:sp>
+      <p:graphicFrame>
+        <p:nvGraphicFramePr>
+          <p:cNvPr id="8" name="grafico-colunas-29" descr=""/>
+          <p:cNvGraphicFramePr/>
+          <p:nvPr/>
+        </p:nvGraphicFramePr>
+        <p:xfrm>
+          <a:off x="777240" y="3200400"/>
+          <a:ext cx="3058058" cy="2606040"/>
+        </p:xfrm>
+        <a:graphic xmlns:a="http://schemas.openxmlformats.org/drawingml/2006/main">
+          <a:graphicData uri="http://schemas.openxmlformats.org/drawingml/2006/chart">
+            <c:chart xmlns:c="http://schemas.openxmlformats.org/drawingml/2006/chart" r:id="rId2"/>
+          </a:graphicData>
+        </a:graphic>
+      </p:graphicFrame>
+      <p:sp>
+        <p:nvSpPr>
+          <p:cNvPr id="9" name="selo-30"/>
           <p:cNvSpPr/>
           <p:nvPr/>
         </p:nvSpPr>
         <p:spPr>
           <a:xfrm>
-            <a:off x="6233008" y="4617720"/>
-            <a:ext cx="5410048" cy="1417320"/>
+            <a:off x="1187328" y="3108960"/>
+            <a:ext cx="822960" cy="822960"/>
+          </a:xfrm>
+          <a:prstGeom prst="ellipse">
+            <a:avLst/>
+          </a:prstGeom>
+          <a:solidFill>
+            <a:schemeClr val="accent4"/>
+          </a:solidFill>
+          <a:ln/>
+        </p:spPr>
+      </p:sp>
+      <p:sp>
+        <p:nvSpPr>
+          <p:cNvPr id="10" name="texto-31"/>
+          <p:cNvSpPr txBox="1"/>
+          <p:nvPr/>
+        </p:nvSpPr>
+        <p:spPr>
+          <a:xfrm>
+            <a:off x="1187328" y="3108960"/>
+            <a:ext cx="822960" cy="822960"/>
+          </a:xfrm>
+          <a:prstGeom prst="rect">
+            <a:avLst/>
+          </a:prstGeom>
+          <a:noFill/>
+          <a:ln/>
+        </p:spPr>
+        <p:txBody>
+          <a:bodyPr wrap="none" lIns="0" tIns="0" rIns="0" bIns="0" rtlCol="0" anchor="ctr"/>
+          <a:lstStyle/>
+          <a:p>
+            <a:pPr algn="ctr" indent="0" marL="0">
+              <a:buNone/>
+            </a:pPr>
+            <a:r>
+              <a:rPr lang="en-US" sz="1600" b="1" dirty="0">
+                <a:solidFill>
+                  <a:schemeClr val="bg1"/>
+                </a:solidFill>
+              </a:rPr>
+              <a:t>2,5×</a:t>
+            </a:r>
+            <a:endParaRPr lang="en-US" sz="1600" dirty="0"/>
+          </a:p>
+          <a:p>
+            <a:pPr algn="ctr" indent="0" marL="0">
+              <a:buNone/>
+            </a:pPr>
+            <a:r>
+              <a:rPr lang="en-US" sz="1000" dirty="0">
+                <a:solidFill>
+                  <a:schemeClr val="bg1"/>
+                </a:solidFill>
+              </a:rPr>
+              <a:t>mais</a:t>
+            </a:r>
+            <a:endParaRPr lang="en-US" sz="1600" dirty="0"/>
+          </a:p>
+        </p:txBody>
+      </p:sp>
+      <p:sp>
+        <p:nvSpPr>
+          <p:cNvPr id="11" name="card-32"/>
+          <p:cNvSpPr/>
+          <p:nvPr/>
+        </p:nvSpPr>
+        <p:spPr>
+          <a:xfrm>
+            <a:off x="4338218" y="2011680"/>
+            <a:ext cx="3515258" cy="4023360"/>
           </a:xfrm>
           <a:prstGeom prst="roundRect">
             <a:avLst>
-              <a:gd name="adj" fmla="val 10323"/>
+              <a:gd name="adj" fmla="val 4162"/>
             </a:avLst>
           </a:prstGeom>
           <a:solidFill>
@@ -4820,14 +5811,14 @@
       </p:sp>
       <p:sp>
         <p:nvSpPr>
-          <p:cNvPr id="20" name="icone-fundo-41"/>
+          <p:cNvPr id="12" name="icone-fundo-33"/>
           <p:cNvSpPr/>
           <p:nvPr/>
         </p:nvSpPr>
         <p:spPr>
           <a:xfrm>
-            <a:off x="6598768" y="4892040"/>
-            <a:ext cx="548640" cy="548640"/>
+            <a:off x="4703978" y="2377440"/>
+            <a:ext cx="640080" cy="640080"/>
           </a:xfrm>
           <a:prstGeom prst="ellipse">
             <a:avLst/>
@@ -4840,22 +5831,22 @@
       </p:sp>
       <p:pic>
         <p:nvPicPr>
-          <p:cNvPr id="21" name="icone-42" descr="preencoded.png">    </p:cNvPr>
+          <p:cNvPr id="13" name="icone-34" descr="preencoded.png">    </p:cNvPr>
           <p:cNvPicPr>
             <a:picLocks noChangeAspect="1"/>
           </p:cNvPicPr>
           <p:nvPr/>
         </p:nvPicPr>
         <p:blipFill>
-          <a:blip r:embed="rId2"/>
+          <a:blip r:embed="rId3"/>
           <a:stretch>
             <a:fillRect/>
           </a:stretch>
         </p:blipFill>
         <p:spPr>
           <a:xfrm>
-            <a:off x="6735928" y="5029200"/>
-            <a:ext cx="274320" cy="274320"/>
+            <a:off x="4863998" y="2537460"/>
+            <a:ext cx="320040" cy="320040"/>
           </a:xfrm>
           <a:prstGeom prst="rect">
             <a:avLst/>
@@ -4864,14 +5855,14 @@
       </p:pic>
       <p:sp>
         <p:nvSpPr>
-          <p:cNvPr id="22" name="texto-43"/>
+          <p:cNvPr id="14" name="texto-35"/>
           <p:cNvSpPr txBox="1"/>
           <p:nvPr/>
         </p:nvSpPr>
         <p:spPr>
           <a:xfrm>
-            <a:off x="7467448" y="4892040"/>
-            <a:ext cx="3809848" cy="365760"/>
+            <a:off x="5526938" y="2377440"/>
+            <a:ext cx="2052218" cy="640080"/>
           </a:xfrm>
           <a:prstGeom prst="rect">
             <a:avLst/>
@@ -4887,17 +5878,249 @@
               <a:buNone/>
             </a:pPr>
             <a:r>
+              <a:rPr lang="en-US" sz="1800" b="1" dirty="0">
+                <a:solidFill>
+                  <a:schemeClr val="tx1"/>
+                </a:solidFill>
+              </a:rPr>
+              <a:t>Custo médio</a:t>
+            </a:r>
+            <a:endParaRPr lang="en-US" sz="1800" dirty="0"/>
+          </a:p>
+          <a:p>
+            <a:pPr indent="0" marL="0">
+              <a:buNone/>
+            </a:pPr>
+            <a:r>
+              <a:rPr lang="en-US" sz="1200" dirty="0">
+                <a:solidFill>
+                  <a:schemeClr val="accent6"/>
+                </a:solidFill>
+              </a:rPr>
+              <a:t>por atendimento</a:t>
+            </a:r>
+            <a:endParaRPr lang="en-US" sz="1800" dirty="0"/>
+          </a:p>
+        </p:txBody>
+      </p:sp>
+      <p:graphicFrame>
+        <p:nvGraphicFramePr>
+          <p:cNvPr id="15" name="grafico-colunas-36" descr=""/>
+          <p:cNvGraphicFramePr/>
+          <p:nvPr/>
+        </p:nvGraphicFramePr>
+        <p:xfrm>
+          <a:off x="4566818" y="3200400"/>
+          <a:ext cx="3058058" cy="2606040"/>
+        </p:xfrm>
+        <a:graphic xmlns:a="http://schemas.openxmlformats.org/drawingml/2006/main">
+          <a:graphicData uri="http://schemas.openxmlformats.org/drawingml/2006/chart">
+            <c:chart xmlns:c="http://schemas.openxmlformats.org/drawingml/2006/chart" r:id="rId4"/>
+          </a:graphicData>
+        </a:graphic>
+      </p:graphicFrame>
+      <p:sp>
+        <p:nvSpPr>
+          <p:cNvPr id="16" name="selo-37"/>
+          <p:cNvSpPr/>
+          <p:nvPr/>
+        </p:nvSpPr>
+        <p:spPr>
+          <a:xfrm>
+            <a:off x="6391829" y="3108960"/>
+            <a:ext cx="822960" cy="822960"/>
+          </a:xfrm>
+          <a:prstGeom prst="ellipse">
+            <a:avLst/>
+          </a:prstGeom>
+          <a:solidFill>
+            <a:schemeClr val="accent4"/>
+          </a:solidFill>
+          <a:ln/>
+        </p:spPr>
+      </p:sp>
+      <p:sp>
+        <p:nvSpPr>
+          <p:cNvPr id="17" name="texto-38"/>
+          <p:cNvSpPr txBox="1"/>
+          <p:nvPr/>
+        </p:nvSpPr>
+        <p:spPr>
+          <a:xfrm>
+            <a:off x="6391829" y="3108960"/>
+            <a:ext cx="822960" cy="822960"/>
+          </a:xfrm>
+          <a:prstGeom prst="rect">
+            <a:avLst/>
+          </a:prstGeom>
+          <a:noFill/>
+          <a:ln/>
+        </p:spPr>
+        <p:txBody>
+          <a:bodyPr wrap="none" lIns="0" tIns="0" rIns="0" bIns="0" rtlCol="0" anchor="ctr"/>
+          <a:lstStyle/>
+          <a:p>
+            <a:pPr algn="ctr" indent="0" marL="0">
+              <a:buNone/>
+            </a:pPr>
+            <a:r>
               <a:rPr lang="en-US" sz="1600" b="1" dirty="0">
                 <a:solidFill>
-                  <a:schemeClr val="accent1"/>
+                  <a:schemeClr val="bg1"/>
                 </a:solidFill>
               </a:rPr>
-              <a:t>Em todos os recortes</a:t>
+              <a:t>−40%</a:t>
             </a:r>
             <a:endParaRPr lang="en-US" sz="1600" dirty="0"/>
           </a:p>
-        </p:txBody>
-      </p:sp>
+          <a:p>
+            <a:pPr algn="ctr" indent="0" marL="0">
+              <a:buNone/>
+            </a:pPr>
+            <a:r>
+              <a:rPr lang="en-US" sz="1000" dirty="0">
+                <a:solidFill>
+                  <a:schemeClr val="bg1"/>
+                </a:solidFill>
+              </a:rPr>
+              <a:t>menor</a:t>
+            </a:r>
+            <a:endParaRPr lang="en-US" sz="1600" dirty="0"/>
+          </a:p>
+        </p:txBody>
+      </p:sp>
+      <p:sp>
+        <p:nvSpPr>
+          <p:cNvPr id="18" name="card-39"/>
+          <p:cNvSpPr/>
+          <p:nvPr/>
+        </p:nvSpPr>
+        <p:spPr>
+          <a:xfrm>
+            <a:off x="8127797" y="2011680"/>
+            <a:ext cx="3515258" cy="4023360"/>
+          </a:xfrm>
+          <a:prstGeom prst="roundRect">
+            <a:avLst>
+              <a:gd name="adj" fmla="val 4162"/>
+            </a:avLst>
+          </a:prstGeom>
+          <a:solidFill>
+            <a:schemeClr val="bg2"/>
+          </a:solidFill>
+          <a:ln/>
+        </p:spPr>
+      </p:sp>
+      <p:sp>
+        <p:nvSpPr>
+          <p:cNvPr id="19" name="icone-fundo-40"/>
+          <p:cNvSpPr/>
+          <p:nvPr/>
+        </p:nvSpPr>
+        <p:spPr>
+          <a:xfrm>
+            <a:off x="8493557" y="2377440"/>
+            <a:ext cx="640080" cy="640080"/>
+          </a:xfrm>
+          <a:prstGeom prst="ellipse">
+            <a:avLst/>
+          </a:prstGeom>
+          <a:solidFill>
+            <a:schemeClr val="accent1"/>
+          </a:solidFill>
+          <a:ln/>
+        </p:spPr>
+      </p:sp>
+      <p:pic>
+        <p:nvPicPr>
+          <p:cNvPr id="20" name="icone-41" descr="preencoded.png">    </p:cNvPr>
+          <p:cNvPicPr>
+            <a:picLocks noChangeAspect="1"/>
+          </p:cNvPicPr>
+          <p:nvPr/>
+        </p:nvPicPr>
+        <p:blipFill>
+          <a:blip r:embed="rId5"/>
+          <a:stretch>
+            <a:fillRect/>
+          </a:stretch>
+        </p:blipFill>
+        <p:spPr>
+          <a:xfrm>
+            <a:off x="8653577" y="2537460"/>
+            <a:ext cx="320040" cy="320040"/>
+          </a:xfrm>
+          <a:prstGeom prst="rect">
+            <a:avLst/>
+          </a:prstGeom>
+        </p:spPr>
+      </p:pic>
+      <p:sp>
+        <p:nvSpPr>
+          <p:cNvPr id="21" name="texto-42"/>
+          <p:cNvSpPr txBox="1"/>
+          <p:nvPr/>
+        </p:nvSpPr>
+        <p:spPr>
+          <a:xfrm>
+            <a:off x="9316517" y="2377440"/>
+            <a:ext cx="2052218" cy="640080"/>
+          </a:xfrm>
+          <a:prstGeom prst="rect">
+            <a:avLst/>
+          </a:prstGeom>
+          <a:noFill/>
+          <a:ln/>
+        </p:spPr>
+        <p:txBody>
+          <a:bodyPr wrap="square" lIns="0" tIns="0" rIns="0" bIns="0" rtlCol="0" anchor="ctr"/>
+          <a:lstStyle/>
+          <a:p>
+            <a:pPr indent="0" marL="0">
+              <a:buNone/>
+            </a:pPr>
+            <a:r>
+              <a:rPr lang="en-US" sz="1800" b="1" dirty="0">
+                <a:solidFill>
+                  <a:schemeClr val="tx1"/>
+                </a:solidFill>
+              </a:rPr>
+              <a:t>Participação</a:t>
+            </a:r>
+            <a:endParaRPr lang="en-US" sz="1800" dirty="0"/>
+          </a:p>
+          <a:p>
+            <a:pPr indent="0" marL="0">
+              <a:buNone/>
+            </a:pPr>
+            <a:r>
+              <a:rPr lang="en-US" sz="1200" dirty="0">
+                <a:solidFill>
+                  <a:schemeClr val="accent6"/>
+                </a:solidFill>
+              </a:rPr>
+              <a:t>base atual</a:t>
+            </a:r>
+            <a:endParaRPr lang="en-US" sz="1800" dirty="0"/>
+          </a:p>
+        </p:txBody>
+      </p:sp>
+      <p:graphicFrame>
+        <p:nvGraphicFramePr>
+          <p:cNvPr id="22" name="grafico-anel-43" descr=""/>
+          <p:cNvGraphicFramePr/>
+          <p:nvPr/>
+        </p:nvGraphicFramePr>
+        <p:xfrm>
+          <a:off x="8902446" y="3154680"/>
+          <a:ext cx="1965960" cy="1965960"/>
+        </p:xfrm>
+        <a:graphic xmlns:a="http://schemas.openxmlformats.org/drawingml/2006/main">
+          <a:graphicData uri="http://schemas.openxmlformats.org/drawingml/2006/chart">
+            <c:chart xmlns:c="http://schemas.openxmlformats.org/drawingml/2006/chart" r:id="rId6"/>
+          </a:graphicData>
+        </a:graphic>
+      </p:graphicFrame>
       <p:sp>
         <p:nvSpPr>
           <p:cNvPr id="23" name="texto-44"/>
@@ -4906,8 +6129,8 @@
         </p:nvSpPr>
         <p:spPr>
           <a:xfrm>
-            <a:off x="7467448" y="5276088"/>
-            <a:ext cx="3809848" cy="594360"/>
+            <a:off x="8902446" y="3726180"/>
+            <a:ext cx="1965960" cy="822960"/>
           </a:xfrm>
           <a:prstGeom prst="rect">
             <a:avLst/>
@@ -4916,21 +6139,223 @@
           <a:ln/>
         </p:spPr>
         <p:txBody>
-          <a:bodyPr wrap="square" lIns="0" tIns="0" rIns="0" bIns="0" rtlCol="0" anchor="t"/>
+          <a:bodyPr wrap="square" lIns="0" tIns="0" rIns="0" bIns="0" rtlCol="0" anchor="ctr"/>
+          <a:lstStyle/>
+          <a:p>
+            <a:pPr algn="ctr" indent="0" marL="0">
+              <a:buNone/>
+            </a:pPr>
+            <a:r>
+              <a:rPr lang="en-US" sz="2400" b="1" dirty="0">
+                <a:solidFill>
+                  <a:schemeClr val="accent1"/>
+                </a:solidFill>
+              </a:rPr>
+              <a:t>55,0%</a:t>
+            </a:r>
+            <a:endParaRPr lang="en-US" sz="2400" dirty="0"/>
+          </a:p>
+          <a:p>
+            <a:pPr algn="ctr" indent="0" marL="0">
+              <a:buNone/>
+            </a:pPr>
+            <a:r>
+              <a:rPr lang="en-US" sz="1100" dirty="0">
+                <a:solidFill>
+                  <a:schemeClr val="accent6"/>
+                </a:solidFill>
+              </a:rPr>
+              <a:t>grupo B</a:t>
+            </a:r>
+            <a:endParaRPr lang="en-US" sz="2400" dirty="0"/>
+          </a:p>
+        </p:txBody>
+      </p:sp>
+      <p:sp>
+        <p:nvSpPr>
+          <p:cNvPr id="24" name="texto-45"/>
+          <p:cNvSpPr txBox="1"/>
+          <p:nvPr/>
+        </p:nvSpPr>
+        <p:spPr>
+          <a:xfrm>
+            <a:off x="8493557" y="5102352"/>
+            <a:ext cx="411480" cy="237744"/>
+          </a:xfrm>
+          <a:prstGeom prst="rect">
+            <a:avLst/>
+          </a:prstGeom>
+          <a:noFill/>
+          <a:ln/>
+        </p:spPr>
+        <p:txBody>
+          <a:bodyPr wrap="square" lIns="0" tIns="0" rIns="0" bIns="0" rtlCol="0" anchor="ctr"/>
           <a:lstStyle/>
           <a:p>
             <a:pPr indent="0" marL="0">
               <a:buNone/>
             </a:pPr>
             <a:r>
-              <a:rPr lang="en-US" sz="1400" dirty="0">
+              <a:rPr lang="en-US" sz="1200" b="1" dirty="0">
                 <a:solidFill>
                   <a:schemeClr val="tx1"/>
                 </a:solidFill>
               </a:rPr>
-              <a:t>A vantagem aparece por período, tipo e fase.</a:t>
-            </a:r>
-            <a:endParaRPr lang="en-US" sz="1400" dirty="0"/>
+              <a:t>jan</a:t>
+            </a:r>
+            <a:endParaRPr lang="en-US" sz="1200" dirty="0"/>
+          </a:p>
+        </p:txBody>
+      </p:sp>
+      <p:sp>
+        <p:nvSpPr>
+          <p:cNvPr id="25" name="barra-comparacao-46"/>
+          <p:cNvSpPr/>
+          <p:nvPr/>
+        </p:nvSpPr>
+        <p:spPr>
+          <a:xfrm>
+            <a:off x="8914181" y="5129784"/>
+            <a:ext cx="509820" cy="182880"/>
+          </a:xfrm>
+          <a:prstGeom prst="roundRect">
+            <a:avLst>
+              <a:gd name="adj" fmla="val 25000"/>
+            </a:avLst>
+          </a:prstGeom>
+          <a:solidFill>
+            <a:schemeClr val="accent3"/>
+          </a:solidFill>
+          <a:ln/>
+        </p:spPr>
+      </p:sp>
+      <p:sp>
+        <p:nvSpPr>
+          <p:cNvPr id="26" name="texto-47"/>
+          <p:cNvSpPr txBox="1"/>
+          <p:nvPr/>
+        </p:nvSpPr>
+        <p:spPr>
+          <a:xfrm>
+            <a:off x="9515440" y="5102352"/>
+            <a:ext cx="822960" cy="237744"/>
+          </a:xfrm>
+          <a:prstGeom prst="rect">
+            <a:avLst/>
+          </a:prstGeom>
+          <a:noFill/>
+          <a:ln/>
+        </p:spPr>
+        <p:txBody>
+          <a:bodyPr wrap="square" lIns="0" tIns="0" rIns="0" bIns="0" rtlCol="0" anchor="ctr"/>
+          <a:lstStyle/>
+          <a:p>
+            <a:pPr indent="0" marL="0">
+              <a:buNone/>
+            </a:pPr>
+            <a:r>
+              <a:rPr lang="en-US" sz="1200" b="1" dirty="0">
+                <a:solidFill>
+                  <a:schemeClr val="accent1"/>
+                </a:solidFill>
+              </a:rPr>
+              <a:t>15,0%</a:t>
+            </a:r>
+            <a:endParaRPr lang="en-US" sz="1200" dirty="0"/>
+          </a:p>
+        </p:txBody>
+      </p:sp>
+      <p:sp>
+        <p:nvSpPr>
+          <p:cNvPr id="27" name="texto-48"/>
+          <p:cNvSpPr txBox="1"/>
+          <p:nvPr/>
+        </p:nvSpPr>
+        <p:spPr>
+          <a:xfrm>
+            <a:off x="8493557" y="5431536"/>
+            <a:ext cx="411480" cy="237744"/>
+          </a:xfrm>
+          <a:prstGeom prst="rect">
+            <a:avLst/>
+          </a:prstGeom>
+          <a:noFill/>
+          <a:ln/>
+        </p:spPr>
+        <p:txBody>
+          <a:bodyPr wrap="square" lIns="0" tIns="0" rIns="0" bIns="0" rtlCol="0" anchor="ctr"/>
+          <a:lstStyle/>
+          <a:p>
+            <a:pPr indent="0" marL="0">
+              <a:buNone/>
+            </a:pPr>
+            <a:r>
+              <a:rPr lang="en-US" sz="1200" b="1" dirty="0">
+                <a:solidFill>
+                  <a:schemeClr val="tx1"/>
+                </a:solidFill>
+              </a:rPr>
+              <a:t>jun</a:t>
+            </a:r>
+            <a:endParaRPr lang="en-US" sz="1200" dirty="0"/>
+          </a:p>
+        </p:txBody>
+      </p:sp>
+      <p:sp>
+        <p:nvSpPr>
+          <p:cNvPr id="28" name="barra-comparacao-49"/>
+          <p:cNvSpPr/>
+          <p:nvPr/>
+        </p:nvSpPr>
+        <p:spPr>
+          <a:xfrm>
+            <a:off x="8914181" y="5458968"/>
+            <a:ext cx="1869338" cy="182880"/>
+          </a:xfrm>
+          <a:prstGeom prst="roundRect">
+            <a:avLst>
+              <a:gd name="adj" fmla="val 25000"/>
+            </a:avLst>
+          </a:prstGeom>
+          <a:solidFill>
+            <a:schemeClr val="accent1"/>
+          </a:solidFill>
+          <a:ln/>
+        </p:spPr>
+      </p:sp>
+      <p:sp>
+        <p:nvSpPr>
+          <p:cNvPr id="29" name="texto-50"/>
+          <p:cNvSpPr txBox="1"/>
+          <p:nvPr/>
+        </p:nvSpPr>
+        <p:spPr>
+          <a:xfrm>
+            <a:off x="10874959" y="5431536"/>
+            <a:ext cx="822960" cy="237744"/>
+          </a:xfrm>
+          <a:prstGeom prst="rect">
+            <a:avLst/>
+          </a:prstGeom>
+          <a:noFill/>
+          <a:ln/>
+        </p:spPr>
+        <p:txBody>
+          <a:bodyPr wrap="square" lIns="0" tIns="0" rIns="0" bIns="0" rtlCol="0" anchor="ctr"/>
+          <a:lstStyle/>
+          <a:p>
+            <a:pPr indent="0" marL="0">
+              <a:buNone/>
+            </a:pPr>
+            <a:r>
+              <a:rPr lang="en-US" sz="1200" b="1" dirty="0">
+                <a:solidFill>
+                  <a:schemeClr val="accent1"/>
+                </a:solidFill>
+              </a:rPr>
+              <a:t>55,0%</a:t>
+            </a:r>
+            <a:endParaRPr lang="en-US" sz="1200" dirty="0"/>
           </a:p>
         </p:txBody>
       </p:sp>
@@ -5036,7 +6461,7 @@
                   <a:schemeClr val="accent2"/>
                 </a:solidFill>
               </a:rPr>
-              <a:t>02 · EVOLUÇÃO MENSAL</a:t>
+              <a:t>02 · COMPARAÇÃO</a:t>
             </a:r>
             <a:endParaRPr lang="en-US" sz="1200" dirty="0"/>
           </a:p>
@@ -5074,7 +6499,7 @@
                   <a:schemeClr val="accent1"/>
                 </a:solidFill>
               </a:rPr>
-              <a:t>Gráfico de colunas empilhadas com legenda própria</a:t>
+              <a:t>Comparação entre dois grupos com selo de destaque</a:t>
             </a:r>
             <a:endParaRPr lang="en-US" sz="2800" dirty="0"/>
           </a:p>
@@ -5082,18 +6507,76 @@
       </p:sp>
       <p:sp>
         <p:nvSpPr>
-          <p:cNvPr id="4" name="legenda-45"/>
+          <p:cNvPr id="4" name="card-51"/>
           <p:cNvSpPr/>
           <p:nvPr/>
         </p:nvSpPr>
         <p:spPr>
           <a:xfrm>
-            <a:off x="548640" y="1865376"/>
-            <a:ext cx="182880" cy="182880"/>
+            <a:off x="548640" y="2011680"/>
+            <a:ext cx="11094415" cy="2331720"/>
           </a:xfrm>
           <a:prstGeom prst="roundRect">
             <a:avLst>
-              <a:gd name="adj" fmla="val 25000"/>
+              <a:gd name="adj" fmla="val 6275"/>
+            </a:avLst>
+          </a:prstGeom>
+          <a:solidFill>
+            <a:schemeClr val="bg2"/>
+          </a:solidFill>
+          <a:ln/>
+        </p:spPr>
+      </p:sp>
+      <p:sp>
+        <p:nvSpPr>
+          <p:cNvPr id="5" name="texto-52"/>
+          <p:cNvSpPr txBox="1"/>
+          <p:nvPr/>
+        </p:nvSpPr>
+        <p:spPr>
+          <a:xfrm>
+            <a:off x="914400" y="2377440"/>
+            <a:ext cx="1920240" cy="685800"/>
+          </a:xfrm>
+          <a:prstGeom prst="rect">
+            <a:avLst/>
+          </a:prstGeom>
+          <a:noFill/>
+          <a:ln/>
+        </p:spPr>
+        <p:txBody>
+          <a:bodyPr wrap="square" lIns="0" tIns="0" rIns="0" bIns="0" rtlCol="0" anchor="ctr"/>
+          <a:lstStyle/>
+          <a:p>
+            <a:pPr indent="0" marL="0">
+              <a:buNone/>
+            </a:pPr>
+            <a:r>
+              <a:rPr lang="en-US" sz="1600" b="1" dirty="0">
+                <a:solidFill>
+                  <a:schemeClr val="tx1"/>
+                </a:solidFill>
+              </a:rPr>
+              <a:t>Grupo A</a:t>
+            </a:r>
+            <a:endParaRPr lang="en-US" sz="1600" dirty="0"/>
+          </a:p>
+        </p:txBody>
+      </p:sp>
+      <p:sp>
+        <p:nvSpPr>
+          <p:cNvPr id="6" name="barra-53"/>
+          <p:cNvSpPr/>
+          <p:nvPr/>
+        </p:nvSpPr>
+        <p:spPr>
+          <a:xfrm>
+            <a:off x="2926080" y="2423160"/>
+            <a:ext cx="2359742" cy="594360"/>
+          </a:xfrm>
+          <a:prstGeom prst="roundRect">
+            <a:avLst>
+              <a:gd name="adj" fmla="val 18462"/>
             </a:avLst>
           </a:prstGeom>
           <a:solidFill>
@@ -5104,14 +6587,14 @@
       </p:sp>
       <p:sp>
         <p:nvSpPr>
-          <p:cNvPr id="5" name="texto-46"/>
+          <p:cNvPr id="7" name="texto-54"/>
           <p:cNvSpPr txBox="1"/>
           <p:nvPr/>
         </p:nvSpPr>
         <p:spPr>
           <a:xfrm>
-            <a:off x="822960" y="1828800"/>
-            <a:ext cx="1463040" cy="256032"/>
+            <a:off x="5468702" y="2377440"/>
+            <a:ext cx="3840480" cy="685800"/>
           </a:xfrm>
           <a:prstGeom prst="rect">
             <a:avLst/>
@@ -5127,31 +6610,78 @@
               <a:buNone/>
             </a:pPr>
             <a:r>
-              <a:rPr lang="en-US" sz="1200" dirty="0">
+              <a:rPr lang="en-US" sz="3200" b="1" dirty="0">
+                <a:solidFill>
+                  <a:schemeClr val="accent1"/>
+                </a:solidFill>
+              </a:rPr>
+              <a:t>25%</a:t>
+            </a:r>
+            <a:pPr indent="0" marL="0">
+              <a:buNone/>
+            </a:pPr>
+            <a:r>
+              <a:rPr lang="en-US" sz="1300" dirty="0">
+                <a:solidFill>
+                  <a:schemeClr val="accent6"/>
+                </a:solidFill>
+              </a:rPr>
+              <a:t>   100 de 400</a:t>
+            </a:r>
+            <a:endParaRPr lang="en-US" sz="3200" dirty="0"/>
+          </a:p>
+        </p:txBody>
+      </p:sp>
+      <p:sp>
+        <p:nvSpPr>
+          <p:cNvPr id="8" name="texto-55"/>
+          <p:cNvSpPr txBox="1"/>
+          <p:nvPr/>
+        </p:nvSpPr>
+        <p:spPr>
+          <a:xfrm>
+            <a:off x="914400" y="3291840"/>
+            <a:ext cx="1920240" cy="685800"/>
+          </a:xfrm>
+          <a:prstGeom prst="rect">
+            <a:avLst/>
+          </a:prstGeom>
+          <a:noFill/>
+          <a:ln/>
+        </p:spPr>
+        <p:txBody>
+          <a:bodyPr wrap="square" lIns="0" tIns="0" rIns="0" bIns="0" rtlCol="0" anchor="ctr"/>
+          <a:lstStyle/>
+          <a:p>
+            <a:pPr indent="0" marL="0">
+              <a:buNone/>
+            </a:pPr>
+            <a:r>
+              <a:rPr lang="en-US" sz="1600" b="1" dirty="0">
                 <a:solidFill>
                   <a:schemeClr val="tx1"/>
                 </a:solidFill>
               </a:rPr>
-              <a:t>Base antiga</a:t>
-            </a:r>
-            <a:endParaRPr lang="en-US" sz="1200" dirty="0"/>
-          </a:p>
-        </p:txBody>
-      </p:sp>
-      <p:sp>
-        <p:nvSpPr>
-          <p:cNvPr id="6" name="legenda-47"/>
+              <a:t>Grupo B</a:t>
+            </a:r>
+            <a:endParaRPr lang="en-US" sz="1600" dirty="0"/>
+          </a:p>
+        </p:txBody>
+      </p:sp>
+      <p:sp>
+        <p:nvSpPr>
+          <p:cNvPr id="9" name="barra-56"/>
           <p:cNvSpPr/>
           <p:nvPr/>
         </p:nvSpPr>
         <p:spPr>
           <a:xfrm>
-            <a:off x="2560320" y="1865376"/>
-            <a:ext cx="182880" cy="182880"/>
+            <a:off x="2926080" y="3337560"/>
+            <a:ext cx="5852160" cy="594360"/>
           </a:xfrm>
           <a:prstGeom prst="roundRect">
             <a:avLst>
-              <a:gd name="adj" fmla="val 25000"/>
+              <a:gd name="adj" fmla="val 18462"/>
             </a:avLst>
           </a:prstGeom>
           <a:solidFill>
@@ -5162,14 +6692,14 @@
       </p:sp>
       <p:sp>
         <p:nvSpPr>
-          <p:cNvPr id="7" name="texto-48"/>
+          <p:cNvPr id="10" name="texto-57"/>
           <p:cNvSpPr txBox="1"/>
           <p:nvPr/>
         </p:nvSpPr>
         <p:spPr>
           <a:xfrm>
-            <a:off x="2834640" y="1828800"/>
-            <a:ext cx="1463040" cy="256032"/>
+            <a:off x="8961120" y="3291840"/>
+            <a:ext cx="3840480" cy="685800"/>
           </a:xfrm>
           <a:prstGeom prst="rect">
             <a:avLst/>
@@ -5185,33 +6715,410 @@
               <a:buNone/>
             </a:pPr>
             <a:r>
-              <a:rPr lang="en-US" sz="1200" dirty="0">
+              <a:rPr lang="en-US" sz="3200" b="1" dirty="0">
+                <a:solidFill>
+                  <a:schemeClr val="accent1"/>
+                </a:solidFill>
+              </a:rPr>
+              <a:t>62%</a:t>
+            </a:r>
+            <a:pPr indent="0" marL="0">
+              <a:buNone/>
+            </a:pPr>
+            <a:r>
+              <a:rPr lang="en-US" sz="1300" dirty="0">
+                <a:solidFill>
+                  <a:schemeClr val="accent6"/>
+                </a:solidFill>
+              </a:rPr>
+              <a:t>   124 de 200</a:t>
+            </a:r>
+            <a:endParaRPr lang="en-US" sz="3200" dirty="0"/>
+          </a:p>
+        </p:txBody>
+      </p:sp>
+      <p:sp>
+        <p:nvSpPr>
+          <p:cNvPr id="11" name="selo-58"/>
+          <p:cNvSpPr/>
+          <p:nvPr/>
+        </p:nvSpPr>
+        <p:spPr>
+          <a:xfrm>
+            <a:off x="10134295" y="2423160"/>
+            <a:ext cx="1188720" cy="1188720"/>
+          </a:xfrm>
+          <a:prstGeom prst="ellipse">
+            <a:avLst/>
+          </a:prstGeom>
+          <a:solidFill>
+            <a:schemeClr val="accent4"/>
+          </a:solidFill>
+          <a:ln/>
+        </p:spPr>
+      </p:sp>
+      <p:sp>
+        <p:nvSpPr>
+          <p:cNvPr id="12" name="texto-59"/>
+          <p:cNvSpPr txBox="1"/>
+          <p:nvPr/>
+        </p:nvSpPr>
+        <p:spPr>
+          <a:xfrm>
+            <a:off x="10134295" y="2423160"/>
+            <a:ext cx="1188720" cy="1188720"/>
+          </a:xfrm>
+          <a:prstGeom prst="rect">
+            <a:avLst/>
+          </a:prstGeom>
+          <a:noFill/>
+          <a:ln/>
+        </p:spPr>
+        <p:txBody>
+          <a:bodyPr wrap="square" lIns="0" tIns="0" rIns="0" bIns="0" rtlCol="0" anchor="ctr"/>
+          <a:lstStyle/>
+          <a:p>
+            <a:pPr algn="ctr" indent="0" marL="0">
+              <a:buNone/>
+            </a:pPr>
+            <a:r>
+              <a:rPr lang="en-US" sz="2600" b="1" dirty="0">
+                <a:solidFill>
+                  <a:schemeClr val="bg1"/>
+                </a:solidFill>
+              </a:rPr>
+              <a:t>2,5×</a:t>
+            </a:r>
+            <a:endParaRPr lang="en-US" sz="2600" dirty="0"/>
+          </a:p>
+          <a:p>
+            <a:pPr algn="ctr" indent="0" marL="0">
+              <a:buNone/>
+            </a:pPr>
+            <a:r>
+              <a:rPr lang="en-US" sz="1100" dirty="0">
+                <a:solidFill>
+                  <a:schemeClr val="bg1"/>
+                </a:solidFill>
+              </a:rPr>
+              <a:t>maior</a:t>
+            </a:r>
+            <a:endParaRPr lang="en-US" sz="2600" dirty="0"/>
+          </a:p>
+        </p:txBody>
+      </p:sp>
+      <p:sp>
+        <p:nvSpPr>
+          <p:cNvPr id="13" name="texto-60"/>
+          <p:cNvSpPr txBox="1"/>
+          <p:nvPr/>
+        </p:nvSpPr>
+        <p:spPr>
+          <a:xfrm>
+            <a:off x="914400" y="3931920"/>
+            <a:ext cx="10362895" cy="274320"/>
+          </a:xfrm>
+          <a:prstGeom prst="rect">
+            <a:avLst/>
+          </a:prstGeom>
+          <a:noFill/>
+          <a:ln/>
+        </p:spPr>
+        <p:txBody>
+          <a:bodyPr wrap="square" lIns="0" tIns="0" rIns="0" bIns="0" rtlCol="0" anchor="ctr"/>
+          <a:lstStyle/>
+          <a:p>
+            <a:pPr indent="0" marL="0">
+              <a:buNone/>
+            </a:pPr>
+            <a:r>
+              <a:rPr lang="en-US" sz="1100" i="1" dirty="0">
+                <a:solidFill>
+                  <a:schemeClr val="accent6"/>
+                </a:solidFill>
+              </a:rPr>
+              <a:t>Definição do indicador em uma linha</a:t>
+            </a:r>
+            <a:endParaRPr lang="en-US" sz="1100" dirty="0"/>
+          </a:p>
+        </p:txBody>
+      </p:sp>
+      <p:sp>
+        <p:nvSpPr>
+          <p:cNvPr id="14" name="card-61"/>
+          <p:cNvSpPr/>
+          <p:nvPr/>
+        </p:nvSpPr>
+        <p:spPr>
+          <a:xfrm>
+            <a:off x="548640" y="4617720"/>
+            <a:ext cx="5410048" cy="1417320"/>
+          </a:xfrm>
+          <a:prstGeom prst="roundRect">
+            <a:avLst>
+              <a:gd name="adj" fmla="val 10323"/>
+            </a:avLst>
+          </a:prstGeom>
+          <a:solidFill>
+            <a:schemeClr val="bg2"/>
+          </a:solidFill>
+          <a:ln/>
+        </p:spPr>
+      </p:sp>
+      <p:sp>
+        <p:nvSpPr>
+          <p:cNvPr id="15" name="icone-fundo-62"/>
+          <p:cNvSpPr/>
+          <p:nvPr/>
+        </p:nvSpPr>
+        <p:spPr>
+          <a:xfrm>
+            <a:off x="914400" y="4892040"/>
+            <a:ext cx="548640" cy="548640"/>
+          </a:xfrm>
+          <a:prstGeom prst="ellipse">
+            <a:avLst/>
+          </a:prstGeom>
+          <a:solidFill>
+            <a:schemeClr val="accent1"/>
+          </a:solidFill>
+          <a:ln/>
+        </p:spPr>
+      </p:sp>
+      <p:pic>
+        <p:nvPicPr>
+          <p:cNvPr id="16" name="icone-63" descr="preencoded.png">    </p:cNvPr>
+          <p:cNvPicPr>
+            <a:picLocks noChangeAspect="1"/>
+          </p:cNvPicPr>
+          <p:nvPr/>
+        </p:nvPicPr>
+        <p:blipFill>
+          <a:blip r:embed="rId1"/>
+          <a:stretch>
+            <a:fillRect/>
+          </a:stretch>
+        </p:blipFill>
+        <p:spPr>
+          <a:xfrm>
+            <a:off x="1051560" y="5029200"/>
+            <a:ext cx="274320" cy="274320"/>
+          </a:xfrm>
+          <a:prstGeom prst="rect">
+            <a:avLst/>
+          </a:prstGeom>
+        </p:spPr>
+      </p:pic>
+      <p:sp>
+        <p:nvSpPr>
+          <p:cNvPr id="17" name="texto-64"/>
+          <p:cNvSpPr txBox="1"/>
+          <p:nvPr/>
+        </p:nvSpPr>
+        <p:spPr>
+          <a:xfrm>
+            <a:off x="1783080" y="4892040"/>
+            <a:ext cx="3809848" cy="365760"/>
+          </a:xfrm>
+          <a:prstGeom prst="rect">
+            <a:avLst/>
+          </a:prstGeom>
+          <a:noFill/>
+          <a:ln/>
+        </p:spPr>
+        <p:txBody>
+          <a:bodyPr wrap="square" lIns="0" tIns="0" rIns="0" bIns="0" rtlCol="0" anchor="ctr"/>
+          <a:lstStyle/>
+          <a:p>
+            <a:pPr indent="0" marL="0">
+              <a:buNone/>
+            </a:pPr>
+            <a:r>
+              <a:rPr lang="en-US" sz="1600" b="1" dirty="0">
+                <a:solidFill>
+                  <a:schemeClr val="accent1"/>
+                </a:solidFill>
+              </a:rPr>
+              <a:t>Critério alternativo</a:t>
+            </a:r>
+            <a:endParaRPr lang="en-US" sz="1600" dirty="0"/>
+          </a:p>
+        </p:txBody>
+      </p:sp>
+      <p:sp>
+        <p:nvSpPr>
+          <p:cNvPr id="18" name="texto-65"/>
+          <p:cNvSpPr txBox="1"/>
+          <p:nvPr/>
+        </p:nvSpPr>
+        <p:spPr>
+          <a:xfrm>
+            <a:off x="1783080" y="5276088"/>
+            <a:ext cx="3809848" cy="594360"/>
+          </a:xfrm>
+          <a:prstGeom prst="rect">
+            <a:avLst/>
+          </a:prstGeom>
+          <a:noFill/>
+          <a:ln/>
+        </p:spPr>
+        <p:txBody>
+          <a:bodyPr wrap="square" lIns="0" tIns="0" rIns="0" bIns="0" rtlCol="0" anchor="t"/>
+          <a:lstStyle/>
+          <a:p>
+            <a:pPr indent="0" marL="0">
+              <a:buNone/>
+            </a:pPr>
+            <a:r>
+              <a:rPr lang="en-US" sz="1400" dirty="0">
                 <a:solidFill>
                   <a:schemeClr val="tx1"/>
                 </a:solidFill>
               </a:rPr>
-              <a:t>Base nova</a:t>
-            </a:r>
-            <a:endParaRPr lang="en-US" sz="1200" dirty="0"/>
-          </a:p>
-        </p:txBody>
-      </p:sp>
-      <p:graphicFrame>
-        <p:nvGraphicFramePr>
-          <p:cNvPr id="8" name="grafico-49" descr=""/>
-          <p:cNvGraphicFramePr/>
-          <p:nvPr/>
-        </p:nvGraphicFramePr>
-        <p:xfrm>
-          <a:off x="548640" y="2194560"/>
-          <a:ext cx="11094415" cy="3749040"/>
-        </p:xfrm>
-        <a:graphic xmlns:a="http://schemas.openxmlformats.org/drawingml/2006/main">
-          <a:graphicData uri="http://schemas.openxmlformats.org/drawingml/2006/chart">
-            <c:chart xmlns:c="http://schemas.openxmlformats.org/drawingml/2006/chart" r:id="rId1"/>
-          </a:graphicData>
-        </a:graphic>
-      </p:graphicFrame>
+              <a:t>Quando a métrica muda de definição, o resultado se mantém.</a:t>
+            </a:r>
+            <a:endParaRPr lang="en-US" sz="1400" dirty="0"/>
+          </a:p>
+        </p:txBody>
+      </p:sp>
+      <p:sp>
+        <p:nvSpPr>
+          <p:cNvPr id="19" name="card-66"/>
+          <p:cNvSpPr/>
+          <p:nvPr/>
+        </p:nvSpPr>
+        <p:spPr>
+          <a:xfrm>
+            <a:off x="6233008" y="4617720"/>
+            <a:ext cx="5410048" cy="1417320"/>
+          </a:xfrm>
+          <a:prstGeom prst="roundRect">
+            <a:avLst>
+              <a:gd name="adj" fmla="val 10323"/>
+            </a:avLst>
+          </a:prstGeom>
+          <a:solidFill>
+            <a:schemeClr val="bg2"/>
+          </a:solidFill>
+          <a:ln/>
+        </p:spPr>
+      </p:sp>
+      <p:sp>
+        <p:nvSpPr>
+          <p:cNvPr id="20" name="icone-fundo-67"/>
+          <p:cNvSpPr/>
+          <p:nvPr/>
+        </p:nvSpPr>
+        <p:spPr>
+          <a:xfrm>
+            <a:off x="6598768" y="4892040"/>
+            <a:ext cx="548640" cy="548640"/>
+          </a:xfrm>
+          <a:prstGeom prst="ellipse">
+            <a:avLst/>
+          </a:prstGeom>
+          <a:solidFill>
+            <a:schemeClr val="accent1"/>
+          </a:solidFill>
+          <a:ln/>
+        </p:spPr>
+      </p:sp>
+      <p:pic>
+        <p:nvPicPr>
+          <p:cNvPr id="21" name="icone-68" descr="preencoded.png">    </p:cNvPr>
+          <p:cNvPicPr>
+            <a:picLocks noChangeAspect="1"/>
+          </p:cNvPicPr>
+          <p:nvPr/>
+        </p:nvPicPr>
+        <p:blipFill>
+          <a:blip r:embed="rId2"/>
+          <a:stretch>
+            <a:fillRect/>
+          </a:stretch>
+        </p:blipFill>
+        <p:spPr>
+          <a:xfrm>
+            <a:off x="6735928" y="5029200"/>
+            <a:ext cx="274320" cy="274320"/>
+          </a:xfrm>
+          <a:prstGeom prst="rect">
+            <a:avLst/>
+          </a:prstGeom>
+        </p:spPr>
+      </p:pic>
+      <p:sp>
+        <p:nvSpPr>
+          <p:cNvPr id="22" name="texto-69"/>
+          <p:cNvSpPr txBox="1"/>
+          <p:nvPr/>
+        </p:nvSpPr>
+        <p:spPr>
+          <a:xfrm>
+            <a:off x="7467448" y="4892040"/>
+            <a:ext cx="3809848" cy="365760"/>
+          </a:xfrm>
+          <a:prstGeom prst="rect">
+            <a:avLst/>
+          </a:prstGeom>
+          <a:noFill/>
+          <a:ln/>
+        </p:spPr>
+        <p:txBody>
+          <a:bodyPr wrap="square" lIns="0" tIns="0" rIns="0" bIns="0" rtlCol="0" anchor="ctr"/>
+          <a:lstStyle/>
+          <a:p>
+            <a:pPr indent="0" marL="0">
+              <a:buNone/>
+            </a:pPr>
+            <a:r>
+              <a:rPr lang="en-US" sz="1600" b="1" dirty="0">
+                <a:solidFill>
+                  <a:schemeClr val="accent1"/>
+                </a:solidFill>
+              </a:rPr>
+              <a:t>Em todos os recortes</a:t>
+            </a:r>
+            <a:endParaRPr lang="en-US" sz="1600" dirty="0"/>
+          </a:p>
+        </p:txBody>
+      </p:sp>
+      <p:sp>
+        <p:nvSpPr>
+          <p:cNvPr id="23" name="texto-70"/>
+          <p:cNvSpPr txBox="1"/>
+          <p:nvPr/>
+        </p:nvSpPr>
+        <p:spPr>
+          <a:xfrm>
+            <a:off x="7467448" y="5276088"/>
+            <a:ext cx="3809848" cy="594360"/>
+          </a:xfrm>
+          <a:prstGeom prst="rect">
+            <a:avLst/>
+          </a:prstGeom>
+          <a:noFill/>
+          <a:ln/>
+        </p:spPr>
+        <p:txBody>
+          <a:bodyPr wrap="square" lIns="0" tIns="0" rIns="0" bIns="0" rtlCol="0" anchor="t"/>
+          <a:lstStyle/>
+          <a:p>
+            <a:pPr indent="0" marL="0">
+              <a:buNone/>
+            </a:pPr>
+            <a:r>
+              <a:rPr lang="en-US" sz="1400" dirty="0">
+                <a:solidFill>
+                  <a:schemeClr val="tx1"/>
+                </a:solidFill>
+              </a:rPr>
+              <a:t>A vantagem aparece por período, tipo e fase.</a:t>
+            </a:r>
+            <a:endParaRPr lang="en-US" sz="1400" dirty="0"/>
+          </a:p>
+        </p:txBody>
+      </p:sp>
       <p:sp>
         <p:nvSpPr>
           <p:cNvPr id="25" name="Slide Number Placeholder 0"/>
@@ -5314,7 +7221,7 @@
                   <a:schemeClr val="accent2"/>
                 </a:solidFill>
               </a:rPr>
-              <a:t>02 · POR PERÍODO</a:t>
+              <a:t>02 · EVOLUÇÃO MENSAL</a:t>
             </a:r>
             <a:endParaRPr lang="en-US" sz="1200" dirty="0"/>
           </a:p>
@@ -5352,7 +7259,7 @@
                   <a:schemeClr val="accent1"/>
                 </a:solidFill>
               </a:rPr>
-              <a:t>Colunas agrupadas com rótulos em porcentagem</a:t>
+              <a:t>Gráfico de colunas empilhadas com legenda própria</a:t>
             </a:r>
             <a:endParaRPr lang="en-US" sz="2800" dirty="0"/>
           </a:p>
@@ -5360,7 +7267,7 @@
       </p:sp>
       <p:sp>
         <p:nvSpPr>
-          <p:cNvPr id="4" name="legenda-50"/>
+          <p:cNvPr id="4" name="legenda-71"/>
           <p:cNvSpPr/>
           <p:nvPr/>
         </p:nvSpPr>
@@ -5382,7 +7289,7 @@
       </p:sp>
       <p:sp>
         <p:nvSpPr>
-          <p:cNvPr id="5" name="texto-51"/>
+          <p:cNvPr id="5" name="texto-72"/>
           <p:cNvSpPr txBox="1"/>
           <p:nvPr/>
         </p:nvSpPr>
@@ -5410,7 +7317,7 @@
                   <a:schemeClr val="tx1"/>
                 </a:solidFill>
               </a:rPr>
-              <a:t>Grupo A</a:t>
+              <a:t>Base antiga</a:t>
             </a:r>
             <a:endParaRPr lang="en-US" sz="1200" dirty="0"/>
           </a:p>
@@ -5418,7 +7325,7 @@
       </p:sp>
       <p:sp>
         <p:nvSpPr>
-          <p:cNvPr id="6" name="legenda-52"/>
+          <p:cNvPr id="6" name="legenda-73"/>
           <p:cNvSpPr/>
           <p:nvPr/>
         </p:nvSpPr>
@@ -5440,7 +7347,7 @@
       </p:sp>
       <p:sp>
         <p:nvSpPr>
-          <p:cNvPr id="7" name="texto-53"/>
+          <p:cNvPr id="7" name="texto-74"/>
           <p:cNvSpPr txBox="1"/>
           <p:nvPr/>
         </p:nvSpPr>
@@ -5468,7 +7375,7 @@
                   <a:schemeClr val="tx1"/>
                 </a:solidFill>
               </a:rPr>
-              <a:t>Grupo B</a:t>
+              <a:t>Base nova</a:t>
             </a:r>
             <a:endParaRPr lang="en-US" sz="1200" dirty="0"/>
           </a:p>
@@ -5476,13 +7383,13 @@
       </p:sp>
       <p:graphicFrame>
         <p:nvGraphicFramePr>
-          <p:cNvPr id="8" name="grafico-54" descr=""/>
+          <p:cNvPr id="8" name="grafico-75" descr=""/>
           <p:cNvGraphicFramePr/>
           <p:nvPr/>
         </p:nvGraphicFramePr>
         <p:xfrm>
           <a:off x="548640" y="2194560"/>
-          <a:ext cx="11094415" cy="3429000"/>
+          <a:ext cx="11094415" cy="3749040"/>
         </p:xfrm>
         <a:graphic xmlns:a="http://schemas.openxmlformats.org/drawingml/2006/main">
           <a:graphicData uri="http://schemas.openxmlformats.org/drawingml/2006/chart">
@@ -5490,42 +7397,6 @@
           </a:graphicData>
         </a:graphic>
       </p:graphicFrame>
-      <p:sp>
-        <p:nvSpPr>
-          <p:cNvPr id="9" name="texto-55"/>
-          <p:cNvSpPr txBox="1"/>
-          <p:nvPr/>
-        </p:nvSpPr>
-        <p:spPr>
-          <a:xfrm>
-            <a:off x="548640" y="5715000"/>
-            <a:ext cx="11094415" cy="274320"/>
-          </a:xfrm>
-          <a:prstGeom prst="rect">
-            <a:avLst/>
-          </a:prstGeom>
-          <a:noFill/>
-          <a:ln/>
-        </p:spPr>
-        <p:txBody>
-          <a:bodyPr wrap="square" lIns="0" tIns="0" rIns="0" bIns="0" rtlCol="0" anchor="ctr"/>
-          <a:lstStyle/>
-          <a:p>
-            <a:pPr indent="0" marL="0">
-              <a:buNone/>
-            </a:pPr>
-            <a:r>
-              <a:rPr lang="en-US" sz="1200" i="1" dirty="0">
-                <a:solidFill>
-                  <a:schemeClr val="accent6"/>
-                </a:solidFill>
-              </a:rPr>
-              <a:t>Nota de rodapé do gráfico: fonte, recorte ou ressalva</a:t>
-            </a:r>
-            <a:endParaRPr lang="en-US" sz="1200" dirty="0"/>
-          </a:p>
-        </p:txBody>
-      </p:sp>
       <p:sp>
         <p:nvSpPr>
           <p:cNvPr id="25" name="Slide Number Placeholder 0"/>
@@ -5628,7 +7499,7 @@
                   <a:schemeClr val="accent2"/>
                 </a:solidFill>
               </a:rPr>
-              <a:t>03 · TABELA</a:t>
+              <a:t>02 · POR PERÍODO</a:t>
             </a:r>
             <a:endParaRPr lang="en-US" sz="1200" dirty="0"/>
           </a:p>
@@ -5666,6 +7537,320 @@
                   <a:schemeClr val="accent1"/>
                 </a:solidFill>
               </a:rPr>
+              <a:t>Colunas agrupadas com rótulos em porcentagem</a:t>
+            </a:r>
+            <a:endParaRPr lang="en-US" sz="2800" dirty="0"/>
+          </a:p>
+        </p:txBody>
+      </p:sp>
+      <p:sp>
+        <p:nvSpPr>
+          <p:cNvPr id="4" name="legenda-76"/>
+          <p:cNvSpPr/>
+          <p:nvPr/>
+        </p:nvSpPr>
+        <p:spPr>
+          <a:xfrm>
+            <a:off x="548640" y="1865376"/>
+            <a:ext cx="182880" cy="182880"/>
+          </a:xfrm>
+          <a:prstGeom prst="roundRect">
+            <a:avLst>
+              <a:gd name="adj" fmla="val 25000"/>
+            </a:avLst>
+          </a:prstGeom>
+          <a:solidFill>
+            <a:schemeClr val="accent3"/>
+          </a:solidFill>
+          <a:ln/>
+        </p:spPr>
+      </p:sp>
+      <p:sp>
+        <p:nvSpPr>
+          <p:cNvPr id="5" name="texto-77"/>
+          <p:cNvSpPr txBox="1"/>
+          <p:nvPr/>
+        </p:nvSpPr>
+        <p:spPr>
+          <a:xfrm>
+            <a:off x="822960" y="1828800"/>
+            <a:ext cx="1463040" cy="256032"/>
+          </a:xfrm>
+          <a:prstGeom prst="rect">
+            <a:avLst/>
+          </a:prstGeom>
+          <a:noFill/>
+          <a:ln/>
+        </p:spPr>
+        <p:txBody>
+          <a:bodyPr wrap="square" lIns="0" tIns="0" rIns="0" bIns="0" rtlCol="0" anchor="ctr"/>
+          <a:lstStyle/>
+          <a:p>
+            <a:pPr indent="0" marL="0">
+              <a:buNone/>
+            </a:pPr>
+            <a:r>
+              <a:rPr lang="en-US" sz="1200" dirty="0">
+                <a:solidFill>
+                  <a:schemeClr val="tx1"/>
+                </a:solidFill>
+              </a:rPr>
+              <a:t>Grupo A</a:t>
+            </a:r>
+            <a:endParaRPr lang="en-US" sz="1200" dirty="0"/>
+          </a:p>
+        </p:txBody>
+      </p:sp>
+      <p:sp>
+        <p:nvSpPr>
+          <p:cNvPr id="6" name="legenda-78"/>
+          <p:cNvSpPr/>
+          <p:nvPr/>
+        </p:nvSpPr>
+        <p:spPr>
+          <a:xfrm>
+            <a:off x="2560320" y="1865376"/>
+            <a:ext cx="182880" cy="182880"/>
+          </a:xfrm>
+          <a:prstGeom prst="roundRect">
+            <a:avLst>
+              <a:gd name="adj" fmla="val 25000"/>
+            </a:avLst>
+          </a:prstGeom>
+          <a:solidFill>
+            <a:schemeClr val="accent1"/>
+          </a:solidFill>
+          <a:ln/>
+        </p:spPr>
+      </p:sp>
+      <p:sp>
+        <p:nvSpPr>
+          <p:cNvPr id="7" name="texto-79"/>
+          <p:cNvSpPr txBox="1"/>
+          <p:nvPr/>
+        </p:nvSpPr>
+        <p:spPr>
+          <a:xfrm>
+            <a:off x="2834640" y="1828800"/>
+            <a:ext cx="1463040" cy="256032"/>
+          </a:xfrm>
+          <a:prstGeom prst="rect">
+            <a:avLst/>
+          </a:prstGeom>
+          <a:noFill/>
+          <a:ln/>
+        </p:spPr>
+        <p:txBody>
+          <a:bodyPr wrap="square" lIns="0" tIns="0" rIns="0" bIns="0" rtlCol="0" anchor="ctr"/>
+          <a:lstStyle/>
+          <a:p>
+            <a:pPr indent="0" marL="0">
+              <a:buNone/>
+            </a:pPr>
+            <a:r>
+              <a:rPr lang="en-US" sz="1200" dirty="0">
+                <a:solidFill>
+                  <a:schemeClr val="tx1"/>
+                </a:solidFill>
+              </a:rPr>
+              <a:t>Grupo B</a:t>
+            </a:r>
+            <a:endParaRPr lang="en-US" sz="1200" dirty="0"/>
+          </a:p>
+        </p:txBody>
+      </p:sp>
+      <p:graphicFrame>
+        <p:nvGraphicFramePr>
+          <p:cNvPr id="8" name="grafico-80" descr=""/>
+          <p:cNvGraphicFramePr/>
+          <p:nvPr/>
+        </p:nvGraphicFramePr>
+        <p:xfrm>
+          <a:off x="548640" y="2194560"/>
+          <a:ext cx="11094415" cy="3429000"/>
+        </p:xfrm>
+        <a:graphic xmlns:a="http://schemas.openxmlformats.org/drawingml/2006/main">
+          <a:graphicData uri="http://schemas.openxmlformats.org/drawingml/2006/chart">
+            <c:chart xmlns:c="http://schemas.openxmlformats.org/drawingml/2006/chart" r:id="rId1"/>
+          </a:graphicData>
+        </a:graphic>
+      </p:graphicFrame>
+      <p:sp>
+        <p:nvSpPr>
+          <p:cNvPr id="9" name="texto-81"/>
+          <p:cNvSpPr txBox="1"/>
+          <p:nvPr/>
+        </p:nvSpPr>
+        <p:spPr>
+          <a:xfrm>
+            <a:off x="548640" y="5715000"/>
+            <a:ext cx="11094415" cy="274320"/>
+          </a:xfrm>
+          <a:prstGeom prst="rect">
+            <a:avLst/>
+          </a:prstGeom>
+          <a:noFill/>
+          <a:ln/>
+        </p:spPr>
+        <p:txBody>
+          <a:bodyPr wrap="square" lIns="0" tIns="0" rIns="0" bIns="0" rtlCol="0" anchor="ctr"/>
+          <a:lstStyle/>
+          <a:p>
+            <a:pPr indent="0" marL="0">
+              <a:buNone/>
+            </a:pPr>
+            <a:r>
+              <a:rPr lang="en-US" sz="1200" i="1" dirty="0">
+                <a:solidFill>
+                  <a:schemeClr val="accent6"/>
+                </a:solidFill>
+              </a:rPr>
+              <a:t>Nota de rodapé do gráfico: fonte, recorte ou ressalva</a:t>
+            </a:r>
+            <a:endParaRPr lang="en-US" sz="1200" dirty="0"/>
+          </a:p>
+        </p:txBody>
+      </p:sp>
+      <p:sp>
+        <p:nvSpPr>
+          <p:cNvPr id="25" name="Slide Number Placeholder 0"/>
+          <p:cNvSpPr>
+            <a:spLocks noGrp="1"/>
+          </p:cNvSpPr>
+          <p:nvPr>
+            <p:ph type="sldNum" sz="quarter" idx="4294967295"/>
+          </p:nvPr>
+        </p:nvSpPr>
+        <p:spPr>
+          <a:xfrm>
+            <a:off x="10561320" y="6291072"/>
+            <a:ext cx="548640" cy="274320"/>
+          </a:xfrm>
+          <a:prstGeom prst="rect">
+            <a:avLst/>
+          </a:prstGeom>
+          <a:extLst>
+            <a:ext uri="{C572A759-6A51-4108-AA02-DFA0A04FC94B}">
+              <ma14:wrappingTextBoxFlag xmlns:ma14="http://schemas.microsoft.com/office/mac/drawingml/2011/main" val="0"/>
+            </a:ext>
+          </a:extLst>
+        </p:spPr>
+        <p:txBody>
+          <a:bodyPr/>
+          <a:lstStyle>
+            <a:lvl1pPr>
+              <a:defRPr sz="1000">
+                <a:solidFill>
+                  <a:schemeClr val="accent6"/>
+                </a:solidFill>
+              </a:defRPr>
+            </a:lvl1pPr>
+          </a:lstStyle>
+          <a:p>
+            <a:pPr algn="r"/>
+            <a:fld id="{F7021451-1387-4CA6-816F-3879F97B5CBC}" type="slidenum">
+              <a:rPr b="0" lang="en-US"/>
+              <a:t>6</a:t>
+            </a:fld>
+            <a:endParaRPr lang="en-US"/>
+          </a:p>
+        </p:txBody>
+      </p:sp>
+    </p:spTree>
+  </p:cSld>
+  <p:clrMapOvr>
+    <a:masterClrMapping/>
+  </p:clrMapOvr>
+</p:sld>
+</file>
+
+<file path=ppt/slides/slide7.xml><?xml version="1.0" encoding="utf-8"?>
+<p:sld xmlns:a="http://schemas.openxmlformats.org/drawingml/2006/main" xmlns:r="http://schemas.openxmlformats.org/officeDocument/2006/relationships" xmlns:p="http://schemas.openxmlformats.org/presentationml/2006/main">
+  <p:cSld name="Slide 7">
+    <p:spTree>
+      <p:nvGrpSpPr>
+        <p:cNvPr id="1" name=""/>
+        <p:cNvGrpSpPr/>
+        <p:nvPr/>
+      </p:nvGrpSpPr>
+      <p:grpSpPr>
+        <a:xfrm>
+          <a:off x="0" y="0"/>
+          <a:ext cx="0" cy="0"/>
+          <a:chOff x="0" y="0"/>
+          <a:chExt cx="0" cy="0"/>
+        </a:xfrm>
+      </p:grpSpPr>
+      <p:sp>
+        <p:nvSpPr>
+          <p:cNvPr id="2" name="Text 0"/>
+          <p:cNvSpPr/>
+          <p:nvPr>
+            <p:ph idx="102" type="body" hasCustomPrompt="1"/>
+          </p:nvPr>
+        </p:nvSpPr>
+        <p:spPr>
+          <a:xfrm>
+            <a:off x="548640" y="384048"/>
+            <a:ext cx="9144000" cy="292608"/>
+          </a:xfrm>
+          <a:prstGeom prst="rect">
+            <a:avLst/>
+          </a:prstGeom>
+          <a:noFill/>
+          <a:ln/>
+        </p:spPr>
+        <p:txBody>
+          <a:bodyPr wrap="square" lIns="0" tIns="0" rIns="0" bIns="0" rtlCol="0" anchor="ctr"/>
+          <a:lstStyle/>
+          <a:p>
+            <a:pPr indent="0" marL="0">
+              <a:buNone/>
+            </a:pPr>
+            <a:r>
+              <a:rPr lang="en-US" sz="1200" b="1" spc="100" kern="0" dirty="0">
+                <a:solidFill>
+                  <a:schemeClr val="accent2"/>
+                </a:solidFill>
+              </a:rPr>
+              <a:t>03 · TABELA</a:t>
+            </a:r>
+            <a:endParaRPr lang="en-US" sz="1200" dirty="0"/>
+          </a:p>
+        </p:txBody>
+      </p:sp>
+      <p:sp>
+        <p:nvSpPr>
+          <p:cNvPr id="3" name="Text 0"/>
+          <p:cNvSpPr/>
+          <p:nvPr>
+            <p:ph idx="103" type="title" hasCustomPrompt="1"/>
+          </p:nvPr>
+        </p:nvSpPr>
+        <p:spPr>
+          <a:xfrm>
+            <a:off x="548640" y="713232"/>
+            <a:ext cx="11094415" cy="960120"/>
+          </a:xfrm>
+          <a:prstGeom prst="rect">
+            <a:avLst/>
+          </a:prstGeom>
+          <a:noFill/>
+          <a:ln/>
+        </p:spPr>
+        <p:txBody>
+          <a:bodyPr wrap="square" lIns="0" tIns="0" rIns="0" bIns="0" rtlCol="0" anchor="t"/>
+          <a:lstStyle/>
+          <a:p>
+            <a:pPr algn="l" indent="0" marL="0">
+              <a:buNone/>
+            </a:pPr>
+            <a:r>
+              <a:rPr lang="en-US" sz="2800" b="1" dirty="0">
+                <a:solidFill>
+                  <a:schemeClr val="accent1"/>
+                </a:solidFill>
+              </a:rPr>
               <a:t>Painel de destaque ao lado de uma tabela</a:t>
             </a:r>
             <a:endParaRPr lang="en-US" sz="2800" dirty="0"/>
@@ -5674,7 +7859,7 @@
       </p:sp>
       <p:sp>
         <p:nvSpPr>
-          <p:cNvPr id="4" name="card-56"/>
+          <p:cNvPr id="4" name="card-82"/>
           <p:cNvSpPr/>
           <p:nvPr/>
         </p:nvSpPr>
@@ -5696,7 +7881,7 @@
       </p:sp>
       <p:sp>
         <p:nvSpPr>
-          <p:cNvPr id="5" name="texto-57"/>
+          <p:cNvPr id="5" name="texto-83"/>
           <p:cNvSpPr txBox="1"/>
           <p:nvPr/>
         </p:nvSpPr>
@@ -5732,7 +7917,7 @@
       </p:sp>
       <p:sp>
         <p:nvSpPr>
-          <p:cNvPr id="6" name="texto-58"/>
+          <p:cNvPr id="6" name="texto-84"/>
           <p:cNvSpPr txBox="1"/>
           <p:nvPr/>
         </p:nvSpPr>
@@ -5768,7 +7953,7 @@
       </p:sp>
       <p:sp>
         <p:nvSpPr>
-          <p:cNvPr id="7" name="texto-59"/>
+          <p:cNvPr id="7" name="texto-85"/>
           <p:cNvSpPr txBox="1"/>
           <p:nvPr/>
         </p:nvSpPr>
@@ -5804,7 +7989,7 @@
       </p:sp>
       <p:graphicFrame>
         <p:nvGraphicFramePr>
-          <p:cNvPr id="7" name="tabela-60"/>
+          <p:cNvPr id="8" name="tabela-86"/>
           <p:cNvGraphicFramePr>
             <a:graphicFrameLocks noGrp="1"/>
           </p:cNvGraphicFramePr>
@@ -6820,7 +9005,7 @@
       </p:graphicFrame>
       <p:sp>
         <p:nvSpPr>
-          <p:cNvPr id="9" name="card-61"/>
+          <p:cNvPr id="9" name="card-87"/>
           <p:cNvSpPr/>
           <p:nvPr/>
         </p:nvSpPr>
@@ -6842,7 +9027,7 @@
       </p:sp>
       <p:sp>
         <p:nvSpPr>
-          <p:cNvPr id="10" name="icone-fundo-62"/>
+          <p:cNvPr id="10" name="icone-fundo-88"/>
           <p:cNvSpPr/>
           <p:nvPr/>
         </p:nvSpPr>
@@ -6862,7 +9047,7 @@
       </p:sp>
       <p:pic>
         <p:nvPicPr>
-          <p:cNvPr id="11" name="icone-63" descr="preencoded.png">    </p:cNvPr>
+          <p:cNvPr id="11" name="icone-89" descr="preencoded.png">    </p:cNvPr>
           <p:cNvPicPr>
             <a:picLocks noChangeAspect="1"/>
           </p:cNvPicPr>
@@ -6886,7 +9071,7 @@
       </p:pic>
       <p:sp>
         <p:nvSpPr>
-          <p:cNvPr id="12" name="texto-64"/>
+          <p:cNvPr id="12" name="texto-90"/>
           <p:cNvSpPr txBox="1"/>
           <p:nvPr/>
         </p:nvSpPr>
@@ -6926,430 +9111,6 @@
                 </a:solidFill>
               </a:rPr>
               <a:t>frase de contexto que complementa a tabela, em uma linha.</a:t>
-            </a:r>
-            <a:endParaRPr lang="en-US" sz="1500" dirty="0"/>
-          </a:p>
-        </p:txBody>
-      </p:sp>
-      <p:sp>
-        <p:nvSpPr>
-          <p:cNvPr id="25" name="Slide Number Placeholder 0"/>
-          <p:cNvSpPr>
-            <a:spLocks noGrp="1"/>
-          </p:cNvSpPr>
-          <p:nvPr>
-            <p:ph type="sldNum" sz="quarter" idx="4294967295"/>
-          </p:nvPr>
-        </p:nvSpPr>
-        <p:spPr>
-          <a:xfrm>
-            <a:off x="10561320" y="6291072"/>
-            <a:ext cx="548640" cy="274320"/>
-          </a:xfrm>
-          <a:prstGeom prst="rect">
-            <a:avLst/>
-          </a:prstGeom>
-          <a:extLst>
-            <a:ext uri="{C572A759-6A51-4108-AA02-DFA0A04FC94B}">
-              <ma14:wrappingTextBoxFlag xmlns:ma14="http://schemas.microsoft.com/office/mac/drawingml/2011/main" val="0"/>
-            </a:ext>
-          </a:extLst>
-        </p:spPr>
-        <p:txBody>
-          <a:bodyPr/>
-          <a:lstStyle>
-            <a:lvl1pPr>
-              <a:defRPr sz="1000">
-                <a:solidFill>
-                  <a:schemeClr val="accent6"/>
-                </a:solidFill>
-              </a:defRPr>
-            </a:lvl1pPr>
-          </a:lstStyle>
-          <a:p>
-            <a:pPr algn="r"/>
-            <a:fld id="{F7021451-1387-4CA6-816F-3879F97B5CBC}" type="slidenum">
-              <a:rPr b="0" lang="en-US"/>
-              <a:t>6</a:t>
-            </a:fld>
-            <a:endParaRPr lang="en-US"/>
-          </a:p>
-        </p:txBody>
-      </p:sp>
-    </p:spTree>
-  </p:cSld>
-  <p:clrMapOvr>
-    <a:masterClrMapping/>
-  </p:clrMapOvr>
-</p:sld>
-</file>
-
-<file path=ppt/slides/slide7.xml><?xml version="1.0" encoding="utf-8"?>
-<p:sld xmlns:a="http://schemas.openxmlformats.org/drawingml/2006/main" xmlns:r="http://schemas.openxmlformats.org/officeDocument/2006/relationships" xmlns:p="http://schemas.openxmlformats.org/presentationml/2006/main">
-  <p:cSld name="Slide 7">
-    <p:spTree>
-      <p:nvGrpSpPr>
-        <p:cNvPr id="1" name=""/>
-        <p:cNvGrpSpPr/>
-        <p:nvPr/>
-      </p:nvGrpSpPr>
-      <p:grpSpPr>
-        <a:xfrm>
-          <a:off x="0" y="0"/>
-          <a:ext cx="0" cy="0"/>
-          <a:chOff x="0" y="0"/>
-          <a:chExt cx="0" cy="0"/>
-        </a:xfrm>
-      </p:grpSpPr>
-      <p:sp>
-        <p:nvSpPr>
-          <p:cNvPr id="2" name="Text 0"/>
-          <p:cNvSpPr/>
-          <p:nvPr>
-            <p:ph idx="102" type="body" hasCustomPrompt="1"/>
-          </p:nvPr>
-        </p:nvSpPr>
-        <p:spPr>
-          <a:xfrm>
-            <a:off x="548640" y="384048"/>
-            <a:ext cx="9144000" cy="292608"/>
-          </a:xfrm>
-          <a:prstGeom prst="rect">
-            <a:avLst/>
-          </a:prstGeom>
-          <a:noFill/>
-          <a:ln/>
-        </p:spPr>
-        <p:txBody>
-          <a:bodyPr wrap="square" lIns="0" tIns="0" rIns="0" bIns="0" rtlCol="0" anchor="ctr"/>
-          <a:lstStyle/>
-          <a:p>
-            <a:pPr indent="0" marL="0">
-              <a:buNone/>
-            </a:pPr>
-            <a:r>
-              <a:rPr lang="en-US" sz="1200" b="1" spc="100" kern="0" dirty="0">
-                <a:solidFill>
-                  <a:schemeClr val="accent2"/>
-                </a:solidFill>
-              </a:rPr>
-              <a:t>03 · ALERTA</a:t>
-            </a:r>
-            <a:endParaRPr lang="en-US" sz="1200" dirty="0"/>
-          </a:p>
-        </p:txBody>
-      </p:sp>
-      <p:sp>
-        <p:nvSpPr>
-          <p:cNvPr id="3" name="Text 0"/>
-          <p:cNvSpPr/>
-          <p:nvPr>
-            <p:ph idx="103" type="title" hasCustomPrompt="1"/>
-          </p:nvPr>
-        </p:nvSpPr>
-        <p:spPr>
-          <a:xfrm>
-            <a:off x="548640" y="713232"/>
-            <a:ext cx="11094415" cy="960120"/>
-          </a:xfrm>
-          <a:prstGeom prst="rect">
-            <a:avLst/>
-          </a:prstGeom>
-          <a:noFill/>
-          <a:ln/>
-        </p:spPr>
-        <p:txBody>
-          <a:bodyPr wrap="square" lIns="0" tIns="0" rIns="0" bIns="0" rtlCol="0" anchor="t"/>
-          <a:lstStyle/>
-          <a:p>
-            <a:pPr algn="l" indent="0" marL="0">
-              <a:buNone/>
-            </a:pPr>
-            <a:r>
-              <a:rPr lang="en-US" sz="2800" b="1" dirty="0">
-                <a:solidFill>
-                  <a:schemeClr val="accent1"/>
-                </a:solidFill>
-              </a:rPr>
-              <a:t>Gráfico de barras horizontais com painel e alerta</a:t>
-            </a:r>
-            <a:endParaRPr lang="en-US" sz="2800" dirty="0"/>
-          </a:p>
-        </p:txBody>
-      </p:sp>
-      <p:sp>
-        <p:nvSpPr>
-          <p:cNvPr id="4" name="card-65"/>
-          <p:cNvSpPr/>
-          <p:nvPr/>
-        </p:nvSpPr>
-        <p:spPr>
-          <a:xfrm>
-            <a:off x="548640" y="2011680"/>
-            <a:ext cx="3200400" cy="2926080"/>
-          </a:xfrm>
-          <a:prstGeom prst="roundRect">
-            <a:avLst>
-              <a:gd name="adj" fmla="val 5000"/>
-            </a:avLst>
-          </a:prstGeom>
-          <a:solidFill>
-            <a:schemeClr val="accent1"/>
-          </a:solidFill>
-          <a:ln/>
-        </p:spPr>
-      </p:sp>
-      <p:sp>
-        <p:nvSpPr>
-          <p:cNvPr id="5" name="icone-fundo-66"/>
-          <p:cNvSpPr/>
-          <p:nvPr/>
-        </p:nvSpPr>
-        <p:spPr>
-          <a:xfrm>
-            <a:off x="914400" y="2377440"/>
-            <a:ext cx="640080" cy="640080"/>
-          </a:xfrm>
-          <a:prstGeom prst="ellipse">
-            <a:avLst/>
-          </a:prstGeom>
-          <a:solidFill>
-            <a:schemeClr val="accent2"/>
-          </a:solidFill>
-          <a:ln/>
-        </p:spPr>
-      </p:sp>
-      <p:pic>
-        <p:nvPicPr>
-          <p:cNvPr id="6" name="icone-67" descr="preencoded.png">    </p:cNvPr>
-          <p:cNvPicPr>
-            <a:picLocks noChangeAspect="1"/>
-          </p:cNvPicPr>
-          <p:nvPr/>
-        </p:nvPicPr>
-        <p:blipFill>
-          <a:blip r:embed="rId1"/>
-          <a:stretch>
-            <a:fillRect/>
-          </a:stretch>
-        </p:blipFill>
-        <p:spPr>
-          <a:xfrm>
-            <a:off x="1074420" y="2537460"/>
-            <a:ext cx="320040" cy="320040"/>
-          </a:xfrm>
-          <a:prstGeom prst="rect">
-            <a:avLst/>
-          </a:prstGeom>
-        </p:spPr>
-      </p:pic>
-      <p:sp>
-        <p:nvSpPr>
-          <p:cNvPr id="7" name="texto-68"/>
-          <p:cNvSpPr txBox="1"/>
-          <p:nvPr/>
-        </p:nvSpPr>
-        <p:spPr>
-          <a:xfrm>
-            <a:off x="914400" y="3246120"/>
-            <a:ext cx="2468880" cy="1005840"/>
-          </a:xfrm>
-          <a:prstGeom prst="rect">
-            <a:avLst/>
-          </a:prstGeom>
-          <a:noFill/>
-          <a:ln/>
-        </p:spPr>
-        <p:txBody>
-          <a:bodyPr wrap="square" lIns="0" tIns="0" rIns="0" bIns="0" rtlCol="0" anchor="ctr"/>
-          <a:lstStyle/>
-          <a:p>
-            <a:pPr indent="0" marL="0">
-              <a:buNone/>
-            </a:pPr>
-            <a:r>
-              <a:rPr lang="en-US" sz="6400" b="1" dirty="0">
-                <a:solidFill>
-                  <a:schemeClr val="bg1"/>
-                </a:solidFill>
-              </a:rPr>
-              <a:t>38</a:t>
-            </a:r>
-            <a:endParaRPr lang="en-US" sz="6400" dirty="0"/>
-          </a:p>
-        </p:txBody>
-      </p:sp>
-      <p:sp>
-        <p:nvSpPr>
-          <p:cNvPr id="8" name="texto-69"/>
-          <p:cNvSpPr txBox="1"/>
-          <p:nvPr/>
-        </p:nvSpPr>
-        <p:spPr>
-          <a:xfrm>
-            <a:off x="914400" y="4297680"/>
-            <a:ext cx="2468880" cy="685800"/>
-          </a:xfrm>
-          <a:prstGeom prst="rect">
-            <a:avLst/>
-          </a:prstGeom>
-          <a:noFill/>
-          <a:ln/>
-        </p:spPr>
-        <p:txBody>
-          <a:bodyPr wrap="square" lIns="0" tIns="0" rIns="0" bIns="0" rtlCol="0" anchor="t"/>
-          <a:lstStyle/>
-          <a:p>
-            <a:pPr indent="0" marL="0">
-              <a:buNone/>
-            </a:pPr>
-            <a:r>
-              <a:rPr lang="en-US" sz="1600" b="1" dirty="0">
-                <a:solidFill>
-                  <a:schemeClr val="bg1"/>
-                </a:solidFill>
-              </a:rPr>
-              <a:t>ocorrências no período</a:t>
-            </a:r>
-            <a:endParaRPr lang="en-US" sz="1600" dirty="0"/>
-          </a:p>
-        </p:txBody>
-      </p:sp>
-      <p:sp>
-        <p:nvSpPr>
-          <p:cNvPr id="9" name="card-70"/>
-          <p:cNvSpPr/>
-          <p:nvPr/>
-        </p:nvSpPr>
-        <p:spPr>
-          <a:xfrm>
-            <a:off x="4023360" y="2011680"/>
-            <a:ext cx="7619695" cy="2926080"/>
-          </a:xfrm>
-          <a:prstGeom prst="roundRect">
-            <a:avLst>
-              <a:gd name="adj" fmla="val 5000"/>
-            </a:avLst>
-          </a:prstGeom>
-          <a:solidFill>
-            <a:schemeClr val="bg2"/>
-          </a:solidFill>
-          <a:ln/>
-        </p:spPr>
-      </p:sp>
-      <p:graphicFrame>
-        <p:nvGraphicFramePr>
-          <p:cNvPr id="10" name="grafico-71" descr=""/>
-          <p:cNvGraphicFramePr/>
-          <p:nvPr/>
-        </p:nvGraphicFramePr>
-        <p:xfrm>
-          <a:off x="4206240" y="2148840"/>
-          <a:ext cx="7253935" cy="2651760"/>
-        </p:xfrm>
-        <a:graphic xmlns:a="http://schemas.openxmlformats.org/drawingml/2006/main">
-          <a:graphicData uri="http://schemas.openxmlformats.org/drawingml/2006/chart">
-            <c:chart xmlns:c="http://schemas.openxmlformats.org/drawingml/2006/chart" r:id="rId2"/>
-          </a:graphicData>
-        </a:graphic>
-      </p:graphicFrame>
-      <p:sp>
-        <p:nvSpPr>
-          <p:cNvPr id="11" name="card-72"/>
-          <p:cNvSpPr/>
-          <p:nvPr/>
-        </p:nvSpPr>
-        <p:spPr>
-          <a:xfrm>
-            <a:off x="548640" y="5257800"/>
-            <a:ext cx="11094415" cy="731520"/>
-          </a:xfrm>
-          <a:prstGeom prst="roundRect">
-            <a:avLst>
-              <a:gd name="adj" fmla="val 20000"/>
-            </a:avLst>
-          </a:prstGeom>
-          <a:solidFill>
-            <a:srgbClr val="FCE9EF"/>
-          </a:solidFill>
-          <a:ln/>
-        </p:spPr>
-      </p:sp>
-      <p:sp>
-        <p:nvSpPr>
-          <p:cNvPr id="12" name="icone-fundo-73"/>
-          <p:cNvSpPr/>
-          <p:nvPr/>
-        </p:nvSpPr>
-        <p:spPr>
-          <a:xfrm>
-            <a:off x="777240" y="5394960"/>
-            <a:ext cx="457200" cy="457200"/>
-          </a:xfrm>
-          <a:prstGeom prst="ellipse">
-            <a:avLst/>
-          </a:prstGeom>
-          <a:solidFill>
-            <a:schemeClr val="accent4"/>
-          </a:solidFill>
-          <a:ln/>
-        </p:spPr>
-      </p:sp>
-      <p:pic>
-        <p:nvPicPr>
-          <p:cNvPr id="13" name="icone-74" descr="preencoded.png">    </p:cNvPr>
-          <p:cNvPicPr>
-            <a:picLocks noChangeAspect="1"/>
-          </p:cNvPicPr>
-          <p:nvPr/>
-        </p:nvPicPr>
-        <p:blipFill>
-          <a:blip r:embed="rId3"/>
-          <a:stretch>
-            <a:fillRect/>
-          </a:stretch>
-        </p:blipFill>
-        <p:spPr>
-          <a:xfrm>
-            <a:off x="891540" y="5509260"/>
-            <a:ext cx="228600" cy="228600"/>
-          </a:xfrm>
-          <a:prstGeom prst="rect">
-            <a:avLst/>
-          </a:prstGeom>
-        </p:spPr>
-      </p:pic>
-      <p:sp>
-        <p:nvSpPr>
-          <p:cNvPr id="14" name="texto-75"/>
-          <p:cNvSpPr txBox="1"/>
-          <p:nvPr/>
-        </p:nvSpPr>
-        <p:spPr>
-          <a:xfrm>
-            <a:off x="1417320" y="5257800"/>
-            <a:ext cx="9997135" cy="731520"/>
-          </a:xfrm>
-          <a:prstGeom prst="rect">
-            <a:avLst/>
-          </a:prstGeom>
-          <a:noFill/>
-          <a:ln/>
-        </p:spPr>
-        <p:txBody>
-          <a:bodyPr wrap="square" lIns="0" tIns="0" rIns="0" bIns="0" rtlCol="0" anchor="ctr"/>
-          <a:lstStyle/>
-          <a:p>
-            <a:pPr indent="0" marL="0">
-              <a:buNone/>
-            </a:pPr>
-            <a:r>
-              <a:rPr lang="en-US" sz="1500" dirty="0">
-                <a:solidFill>
-                  <a:schemeClr val="tx1"/>
-                </a:solidFill>
-              </a:rPr>
-              <a:t>Frase de alerta: o que esse número significa para a decisão.</a:t>
             </a:r>
             <a:endParaRPr lang="en-US" sz="1500" dirty="0"/>
           </a:p>
@@ -7457,7 +9218,7 @@
                   <a:schemeClr val="accent2"/>
                 </a:solidFill>
               </a:rPr>
-              <a:t>04 · FRENTES</a:t>
+              <a:t>03 · ALERTA</a:t>
             </a:r>
             <a:endParaRPr lang="en-US" sz="1200" dirty="0"/>
           </a:p>
@@ -7495,7 +9256,7 @@
                   <a:schemeClr val="accent1"/>
                 </a:solidFill>
               </a:rPr>
-              <a:t>Grade de cards com ícone</a:t>
+              <a:t>Gráfico de barras horizontais com painel e alerta</a:t>
             </a:r>
             <a:endParaRPr lang="en-US" sz="2800" dirty="0"/>
           </a:p>
@@ -7503,39 +9264,19 @@
       </p:sp>
       <p:sp>
         <p:nvSpPr>
-          <p:cNvPr id="4" name="card-76"/>
+          <p:cNvPr id="4" name="card-91"/>
           <p:cNvSpPr/>
           <p:nvPr/>
         </p:nvSpPr>
         <p:spPr>
           <a:xfrm>
             <a:off x="548640" y="2011680"/>
-            <a:ext cx="5410048" cy="1874520"/>
+            <a:ext cx="3200400" cy="2926080"/>
           </a:xfrm>
           <a:prstGeom prst="roundRect">
             <a:avLst>
-              <a:gd name="adj" fmla="val 7805"/>
+              <a:gd name="adj" fmla="val 5000"/>
             </a:avLst>
-          </a:prstGeom>
-          <a:solidFill>
-            <a:schemeClr val="bg2"/>
-          </a:solidFill>
-          <a:ln/>
-        </p:spPr>
-      </p:sp>
-      <p:sp>
-        <p:nvSpPr>
-          <p:cNvPr id="5" name="icone-fundo-77"/>
-          <p:cNvSpPr/>
-          <p:nvPr/>
-        </p:nvSpPr>
-        <p:spPr>
-          <a:xfrm>
-            <a:off x="914400" y="2286000"/>
-            <a:ext cx="548640" cy="548640"/>
-          </a:xfrm>
-          <a:prstGeom prst="ellipse">
-            <a:avLst/>
           </a:prstGeom>
           <a:solidFill>
             <a:schemeClr val="accent1"/>
@@ -7543,9 +9284,29 @@
           <a:ln/>
         </p:spPr>
       </p:sp>
+      <p:sp>
+        <p:nvSpPr>
+          <p:cNvPr id="5" name="icone-fundo-92"/>
+          <p:cNvSpPr/>
+          <p:nvPr/>
+        </p:nvSpPr>
+        <p:spPr>
+          <a:xfrm>
+            <a:off x="914400" y="2377440"/>
+            <a:ext cx="640080" cy="640080"/>
+          </a:xfrm>
+          <a:prstGeom prst="ellipse">
+            <a:avLst/>
+          </a:prstGeom>
+          <a:solidFill>
+            <a:schemeClr val="accent2"/>
+          </a:solidFill>
+          <a:ln/>
+        </p:spPr>
+      </p:sp>
       <p:pic>
         <p:nvPicPr>
-          <p:cNvPr id="6" name="icone-78" descr="preencoded.png">    </p:cNvPr>
+          <p:cNvPr id="6" name="icone-93" descr="preencoded.png">    </p:cNvPr>
           <p:cNvPicPr>
             <a:picLocks noChangeAspect="1"/>
           </p:cNvPicPr>
@@ -7559,8 +9320,8 @@
         </p:blipFill>
         <p:spPr>
           <a:xfrm>
-            <a:off x="1051560" y="2423160"/>
-            <a:ext cx="274320" cy="274320"/>
+            <a:off x="1074420" y="2537460"/>
+            <a:ext cx="320040" cy="320040"/>
           </a:xfrm>
           <a:prstGeom prst="rect">
             <a:avLst/>
@@ -7569,14 +9330,14 @@
       </p:pic>
       <p:sp>
         <p:nvSpPr>
-          <p:cNvPr id="7" name="texto-79"/>
+          <p:cNvPr id="7" name="texto-94"/>
           <p:cNvSpPr txBox="1"/>
           <p:nvPr/>
         </p:nvSpPr>
         <p:spPr>
           <a:xfrm>
-            <a:off x="1783080" y="2286000"/>
-            <a:ext cx="3809848" cy="365760"/>
+            <a:off x="914400" y="3246120"/>
+            <a:ext cx="2468880" cy="1005840"/>
           </a:xfrm>
           <a:prstGeom prst="rect">
             <a:avLst/>
@@ -7592,27 +9353,27 @@
               <a:buNone/>
             </a:pPr>
             <a:r>
-              <a:rPr lang="en-US" sz="1600" b="1" dirty="0">
-                <a:solidFill>
-                  <a:schemeClr val="accent1"/>
+              <a:rPr lang="en-US" sz="6400" b="1" dirty="0">
+                <a:solidFill>
+                  <a:schemeClr val="bg1"/>
                 </a:solidFill>
               </a:rPr>
-              <a:t>Primeira frente</a:t>
-            </a:r>
-            <a:endParaRPr lang="en-US" sz="1600" dirty="0"/>
-          </a:p>
-        </p:txBody>
-      </p:sp>
-      <p:sp>
-        <p:nvSpPr>
-          <p:cNvPr id="8" name="texto-80"/>
+              <a:t>38</a:t>
+            </a:r>
+            <a:endParaRPr lang="en-US" sz="6400" dirty="0"/>
+          </a:p>
+        </p:txBody>
+      </p:sp>
+      <p:sp>
+        <p:nvSpPr>
+          <p:cNvPr id="8" name="texto-95"/>
           <p:cNvSpPr txBox="1"/>
           <p:nvPr/>
         </p:nvSpPr>
         <p:spPr>
           <a:xfrm>
-            <a:off x="1783080" y="2670048"/>
-            <a:ext cx="3809848" cy="1051560"/>
+            <a:off x="914400" y="4297680"/>
+            <a:ext cx="2468880" cy="685800"/>
           </a:xfrm>
           <a:prstGeom prst="rect">
             <a:avLst/>
@@ -7628,31 +9389,31 @@
               <a:buNone/>
             </a:pPr>
             <a:r>
-              <a:rPr lang="en-US" sz="1400" dirty="0">
-                <a:solidFill>
-                  <a:schemeClr val="tx1"/>
+              <a:rPr lang="en-US" sz="1600" b="1" dirty="0">
+                <a:solidFill>
+                  <a:schemeClr val="bg1"/>
                 </a:solidFill>
               </a:rPr>
-              <a:t>Descrição curta do que é feito e por quem.</a:t>
-            </a:r>
-            <a:endParaRPr lang="en-US" sz="1400" dirty="0"/>
-          </a:p>
-        </p:txBody>
-      </p:sp>
-      <p:sp>
-        <p:nvSpPr>
-          <p:cNvPr id="9" name="card-81"/>
+              <a:t>ocorrências no período</a:t>
+            </a:r>
+            <a:endParaRPr lang="en-US" sz="1600" dirty="0"/>
+          </a:p>
+        </p:txBody>
+      </p:sp>
+      <p:sp>
+        <p:nvSpPr>
+          <p:cNvPr id="9" name="card-96"/>
           <p:cNvSpPr/>
           <p:nvPr/>
         </p:nvSpPr>
         <p:spPr>
           <a:xfrm>
-            <a:off x="6233008" y="2011680"/>
-            <a:ext cx="5410048" cy="1874520"/>
+            <a:off x="4023360" y="2011680"/>
+            <a:ext cx="7619695" cy="2926080"/>
           </a:xfrm>
           <a:prstGeom prst="roundRect">
             <a:avLst>
-              <a:gd name="adj" fmla="val 7805"/>
+              <a:gd name="adj" fmla="val 5000"/>
             </a:avLst>
           </a:prstGeom>
           <a:solidFill>
@@ -7661,167 +9422,67 @@
           <a:ln/>
         </p:spPr>
       </p:sp>
-      <p:sp>
-        <p:nvSpPr>
-          <p:cNvPr id="10" name="icone-fundo-82"/>
+      <p:graphicFrame>
+        <p:nvGraphicFramePr>
+          <p:cNvPr id="10" name="grafico-97" descr=""/>
+          <p:cNvGraphicFramePr/>
+          <p:nvPr/>
+        </p:nvGraphicFramePr>
+        <p:xfrm>
+          <a:off x="4206240" y="2148840"/>
+          <a:ext cx="7253935" cy="2651760"/>
+        </p:xfrm>
+        <a:graphic xmlns:a="http://schemas.openxmlformats.org/drawingml/2006/main">
+          <a:graphicData uri="http://schemas.openxmlformats.org/drawingml/2006/chart">
+            <c:chart xmlns:c="http://schemas.openxmlformats.org/drawingml/2006/chart" r:id="rId2"/>
+          </a:graphicData>
+        </a:graphic>
+      </p:graphicFrame>
+      <p:sp>
+        <p:nvSpPr>
+          <p:cNvPr id="11" name="card-98"/>
           <p:cNvSpPr/>
           <p:nvPr/>
         </p:nvSpPr>
         <p:spPr>
           <a:xfrm>
-            <a:off x="6598768" y="2286000"/>
-            <a:ext cx="548640" cy="548640"/>
+            <a:off x="548640" y="5257800"/>
+            <a:ext cx="11094415" cy="731520"/>
+          </a:xfrm>
+          <a:prstGeom prst="roundRect">
+            <a:avLst>
+              <a:gd name="adj" fmla="val 20000"/>
+            </a:avLst>
+          </a:prstGeom>
+          <a:solidFill>
+            <a:srgbClr val="FCE9EF"/>
+          </a:solidFill>
+          <a:ln/>
+        </p:spPr>
+      </p:sp>
+      <p:sp>
+        <p:nvSpPr>
+          <p:cNvPr id="12" name="icone-fundo-99"/>
+          <p:cNvSpPr/>
+          <p:nvPr/>
+        </p:nvSpPr>
+        <p:spPr>
+          <a:xfrm>
+            <a:off x="777240" y="5394960"/>
+            <a:ext cx="457200" cy="457200"/>
           </a:xfrm>
           <a:prstGeom prst="ellipse">
             <a:avLst/>
           </a:prstGeom>
           <a:solidFill>
-            <a:schemeClr val="accent1"/>
+            <a:schemeClr val="accent4"/>
           </a:solidFill>
           <a:ln/>
         </p:spPr>
       </p:sp>
       <p:pic>
         <p:nvPicPr>
-          <p:cNvPr id="11" name="icone-83" descr="preencoded.png">    </p:cNvPr>
-          <p:cNvPicPr>
-            <a:picLocks noChangeAspect="1"/>
-          </p:cNvPicPr>
-          <p:nvPr/>
-        </p:nvPicPr>
-        <p:blipFill>
-          <a:blip r:embed="rId2"/>
-          <a:stretch>
-            <a:fillRect/>
-          </a:stretch>
-        </p:blipFill>
-        <p:spPr>
-          <a:xfrm>
-            <a:off x="6735928" y="2423160"/>
-            <a:ext cx="274320" cy="274320"/>
-          </a:xfrm>
-          <a:prstGeom prst="rect">
-            <a:avLst/>
-          </a:prstGeom>
-        </p:spPr>
-      </p:pic>
-      <p:sp>
-        <p:nvSpPr>
-          <p:cNvPr id="12" name="texto-84"/>
-          <p:cNvSpPr txBox="1"/>
-          <p:nvPr/>
-        </p:nvSpPr>
-        <p:spPr>
-          <a:xfrm>
-            <a:off x="7467448" y="2286000"/>
-            <a:ext cx="3809848" cy="365760"/>
-          </a:xfrm>
-          <a:prstGeom prst="rect">
-            <a:avLst/>
-          </a:prstGeom>
-          <a:noFill/>
-          <a:ln/>
-        </p:spPr>
-        <p:txBody>
-          <a:bodyPr wrap="square" lIns="0" tIns="0" rIns="0" bIns="0" rtlCol="0" anchor="ctr"/>
-          <a:lstStyle/>
-          <a:p>
-            <a:pPr indent="0" marL="0">
-              <a:buNone/>
-            </a:pPr>
-            <a:r>
-              <a:rPr lang="en-US" sz="1600" b="1" dirty="0">
-                <a:solidFill>
-                  <a:schemeClr val="accent1"/>
-                </a:solidFill>
-              </a:rPr>
-              <a:t>Segunda frente</a:t>
-            </a:r>
-            <a:endParaRPr lang="en-US" sz="1600" dirty="0"/>
-          </a:p>
-        </p:txBody>
-      </p:sp>
-      <p:sp>
-        <p:nvSpPr>
-          <p:cNvPr id="13" name="texto-85"/>
-          <p:cNvSpPr txBox="1"/>
-          <p:nvPr/>
-        </p:nvSpPr>
-        <p:spPr>
-          <a:xfrm>
-            <a:off x="7467448" y="2670048"/>
-            <a:ext cx="3809848" cy="1051560"/>
-          </a:xfrm>
-          <a:prstGeom prst="rect">
-            <a:avLst/>
-          </a:prstGeom>
-          <a:noFill/>
-          <a:ln/>
-        </p:spPr>
-        <p:txBody>
-          <a:bodyPr wrap="square" lIns="0" tIns="0" rIns="0" bIns="0" rtlCol="0" anchor="t"/>
-          <a:lstStyle/>
-          <a:p>
-            <a:pPr indent="0" marL="0">
-              <a:buNone/>
-            </a:pPr>
-            <a:r>
-              <a:rPr lang="en-US" sz="1400" dirty="0">
-                <a:solidFill>
-                  <a:schemeClr val="tx1"/>
-                </a:solidFill>
-              </a:rPr>
-              <a:t>Descrição curta do que é feito e por quem.</a:t>
-            </a:r>
-            <a:endParaRPr lang="en-US" sz="1400" dirty="0"/>
-          </a:p>
-        </p:txBody>
-      </p:sp>
-      <p:sp>
-        <p:nvSpPr>
-          <p:cNvPr id="14" name="card-86"/>
-          <p:cNvSpPr/>
-          <p:nvPr/>
-        </p:nvSpPr>
-        <p:spPr>
-          <a:xfrm>
-            <a:off x="548640" y="4160520"/>
-            <a:ext cx="5410048" cy="1874520"/>
-          </a:xfrm>
-          <a:prstGeom prst="roundRect">
-            <a:avLst>
-              <a:gd name="adj" fmla="val 7805"/>
-            </a:avLst>
-          </a:prstGeom>
-          <a:solidFill>
-            <a:schemeClr val="bg2"/>
-          </a:solidFill>
-          <a:ln/>
-        </p:spPr>
-      </p:sp>
-      <p:sp>
-        <p:nvSpPr>
-          <p:cNvPr id="15" name="icone-fundo-87"/>
-          <p:cNvSpPr/>
-          <p:nvPr/>
-        </p:nvSpPr>
-        <p:spPr>
-          <a:xfrm>
-            <a:off x="914400" y="4434840"/>
-            <a:ext cx="548640" cy="548640"/>
-          </a:xfrm>
-          <a:prstGeom prst="ellipse">
-            <a:avLst/>
-          </a:prstGeom>
-          <a:solidFill>
-            <a:schemeClr val="accent1"/>
-          </a:solidFill>
-          <a:ln/>
-        </p:spPr>
-      </p:sp>
-      <p:pic>
-        <p:nvPicPr>
-          <p:cNvPr id="16" name="icone-88" descr="preencoded.png">    </p:cNvPr>
+          <p:cNvPr id="13" name="icone-100" descr="preencoded.png">    </p:cNvPr>
           <p:cNvPicPr>
             <a:picLocks noChangeAspect="1"/>
           </p:cNvPicPr>
@@ -7835,8 +9496,8 @@
         </p:blipFill>
         <p:spPr>
           <a:xfrm>
-            <a:off x="1051560" y="4572000"/>
-            <a:ext cx="274320" cy="274320"/>
+            <a:off x="891540" y="5509260"/>
+            <a:ext cx="228600" cy="228600"/>
           </a:xfrm>
           <a:prstGeom prst="rect">
             <a:avLst/>
@@ -7845,14 +9506,14 @@
       </p:pic>
       <p:sp>
         <p:nvSpPr>
-          <p:cNvPr id="17" name="texto-89"/>
+          <p:cNvPr id="14" name="texto-101"/>
           <p:cNvSpPr txBox="1"/>
           <p:nvPr/>
         </p:nvSpPr>
         <p:spPr>
           <a:xfrm>
-            <a:off x="1783080" y="4434840"/>
-            <a:ext cx="3809848" cy="365760"/>
+            <a:off x="1417320" y="5257800"/>
+            <a:ext cx="9997135" cy="731520"/>
           </a:xfrm>
           <a:prstGeom prst="rect">
             <a:avLst/>
@@ -7868,188 +9529,14 @@
               <a:buNone/>
             </a:pPr>
             <a:r>
-              <a:rPr lang="en-US" sz="1600" b="1" dirty="0">
-                <a:solidFill>
-                  <a:schemeClr val="accent1"/>
+              <a:rPr lang="en-US" sz="1500" dirty="0">
+                <a:solidFill>
+                  <a:schemeClr val="tx1"/>
                 </a:solidFill>
               </a:rPr>
-              <a:t>Terceira frente</a:t>
-            </a:r>
-            <a:endParaRPr lang="en-US" sz="1600" dirty="0"/>
-          </a:p>
-        </p:txBody>
-      </p:sp>
-      <p:sp>
-        <p:nvSpPr>
-          <p:cNvPr id="18" name="texto-90"/>
-          <p:cNvSpPr txBox="1"/>
-          <p:nvPr/>
-        </p:nvSpPr>
-        <p:spPr>
-          <a:xfrm>
-            <a:off x="1783080" y="4818888"/>
-            <a:ext cx="3809848" cy="1051560"/>
-          </a:xfrm>
-          <a:prstGeom prst="rect">
-            <a:avLst/>
-          </a:prstGeom>
-          <a:noFill/>
-          <a:ln/>
-        </p:spPr>
-        <p:txBody>
-          <a:bodyPr wrap="square" lIns="0" tIns="0" rIns="0" bIns="0" rtlCol="0" anchor="t"/>
-          <a:lstStyle/>
-          <a:p>
-            <a:pPr indent="0" marL="0">
-              <a:buNone/>
-            </a:pPr>
-            <a:r>
-              <a:rPr lang="en-US" sz="1400" dirty="0">
-                <a:solidFill>
-                  <a:schemeClr val="tx1"/>
-                </a:solidFill>
-              </a:rPr>
-              <a:t>Descrição curta do que é feito e por quem.</a:t>
-            </a:r>
-            <a:endParaRPr lang="en-US" sz="1400" dirty="0"/>
-          </a:p>
-        </p:txBody>
-      </p:sp>
-      <p:sp>
-        <p:nvSpPr>
-          <p:cNvPr id="19" name="card-91"/>
-          <p:cNvSpPr/>
-          <p:nvPr/>
-        </p:nvSpPr>
-        <p:spPr>
-          <a:xfrm>
-            <a:off x="6233008" y="4160520"/>
-            <a:ext cx="5410048" cy="1874520"/>
-          </a:xfrm>
-          <a:prstGeom prst="roundRect">
-            <a:avLst>
-              <a:gd name="adj" fmla="val 7805"/>
-            </a:avLst>
-          </a:prstGeom>
-          <a:solidFill>
-            <a:schemeClr val="bg2"/>
-          </a:solidFill>
-          <a:ln/>
-        </p:spPr>
-      </p:sp>
-      <p:sp>
-        <p:nvSpPr>
-          <p:cNvPr id="20" name="icone-fundo-92"/>
-          <p:cNvSpPr/>
-          <p:nvPr/>
-        </p:nvSpPr>
-        <p:spPr>
-          <a:xfrm>
-            <a:off x="6598768" y="4434840"/>
-            <a:ext cx="548640" cy="548640"/>
-          </a:xfrm>
-          <a:prstGeom prst="ellipse">
-            <a:avLst/>
-          </a:prstGeom>
-          <a:solidFill>
-            <a:schemeClr val="accent1"/>
-          </a:solidFill>
-          <a:ln/>
-        </p:spPr>
-      </p:sp>
-      <p:pic>
-        <p:nvPicPr>
-          <p:cNvPr id="21" name="icone-93" descr="preencoded.png">    </p:cNvPr>
-          <p:cNvPicPr>
-            <a:picLocks noChangeAspect="1"/>
-          </p:cNvPicPr>
-          <p:nvPr/>
-        </p:nvPicPr>
-        <p:blipFill>
-          <a:blip r:embed="rId4"/>
-          <a:stretch>
-            <a:fillRect/>
-          </a:stretch>
-        </p:blipFill>
-        <p:spPr>
-          <a:xfrm>
-            <a:off x="6735928" y="4572000"/>
-            <a:ext cx="274320" cy="274320"/>
-          </a:xfrm>
-          <a:prstGeom prst="rect">
-            <a:avLst/>
-          </a:prstGeom>
-        </p:spPr>
-      </p:pic>
-      <p:sp>
-        <p:nvSpPr>
-          <p:cNvPr id="22" name="texto-94"/>
-          <p:cNvSpPr txBox="1"/>
-          <p:nvPr/>
-        </p:nvSpPr>
-        <p:spPr>
-          <a:xfrm>
-            <a:off x="7467448" y="4434840"/>
-            <a:ext cx="3809848" cy="365760"/>
-          </a:xfrm>
-          <a:prstGeom prst="rect">
-            <a:avLst/>
-          </a:prstGeom>
-          <a:noFill/>
-          <a:ln/>
-        </p:spPr>
-        <p:txBody>
-          <a:bodyPr wrap="square" lIns="0" tIns="0" rIns="0" bIns="0" rtlCol="0" anchor="ctr"/>
-          <a:lstStyle/>
-          <a:p>
-            <a:pPr indent="0" marL="0">
-              <a:buNone/>
-            </a:pPr>
-            <a:r>
-              <a:rPr lang="en-US" sz="1600" b="1" dirty="0">
-                <a:solidFill>
-                  <a:schemeClr val="accent1"/>
-                </a:solidFill>
-              </a:rPr>
-              <a:t>Quarta frente</a:t>
-            </a:r>
-            <a:endParaRPr lang="en-US" sz="1600" dirty="0"/>
-          </a:p>
-        </p:txBody>
-      </p:sp>
-      <p:sp>
-        <p:nvSpPr>
-          <p:cNvPr id="23" name="texto-95"/>
-          <p:cNvSpPr txBox="1"/>
-          <p:nvPr/>
-        </p:nvSpPr>
-        <p:spPr>
-          <a:xfrm>
-            <a:off x="7467448" y="4818888"/>
-            <a:ext cx="3809848" cy="1051560"/>
-          </a:xfrm>
-          <a:prstGeom prst="rect">
-            <a:avLst/>
-          </a:prstGeom>
-          <a:noFill/>
-          <a:ln/>
-        </p:spPr>
-        <p:txBody>
-          <a:bodyPr wrap="square" lIns="0" tIns="0" rIns="0" bIns="0" rtlCol="0" anchor="t"/>
-          <a:lstStyle/>
-          <a:p>
-            <a:pPr indent="0" marL="0">
-              <a:buNone/>
-            </a:pPr>
-            <a:r>
-              <a:rPr lang="en-US" sz="1400" dirty="0">
-                <a:solidFill>
-                  <a:schemeClr val="tx1"/>
-                </a:solidFill>
-              </a:rPr>
-              <a:t>Descrição curta do que é feito e por quem.</a:t>
-            </a:r>
-            <a:endParaRPr lang="en-US" sz="1400" dirty="0"/>
+              <a:t>Frase de alerta: o que esse número significa para a decisão.</a:t>
+            </a:r>
+            <a:endParaRPr lang="en-US" sz="1500" dirty="0"/>
           </a:p>
         </p:txBody>
       </p:sp>
@@ -8155,7 +9642,7 @@
                   <a:schemeClr val="accent2"/>
                 </a:solidFill>
               </a:rPr>
-              <a:t>04 · DUAS COLUNAS</a:t>
+              <a:t>04 · FRENTES</a:t>
             </a:r>
             <a:endParaRPr lang="en-US" sz="1200" dirty="0"/>
           </a:p>
@@ -8193,7 +9680,7 @@
                   <a:schemeClr val="accent1"/>
                 </a:solidFill>
               </a:rPr>
-              <a:t>Duas colunas com listas, uma em destaque</a:t>
+              <a:t>Grade de cards com ícone</a:t>
             </a:r>
             <a:endParaRPr lang="en-US" sz="2800" dirty="0"/>
           </a:p>
@@ -8201,18 +9688,18 @@
       </p:sp>
       <p:sp>
         <p:nvSpPr>
-          <p:cNvPr id="4" name="card-96"/>
+          <p:cNvPr id="4" name="card-102"/>
           <p:cNvSpPr/>
           <p:nvPr/>
         </p:nvSpPr>
         <p:spPr>
           <a:xfrm>
             <a:off x="548640" y="2011680"/>
-            <a:ext cx="5410048" cy="4023360"/>
+            <a:ext cx="5410048" cy="1874520"/>
           </a:xfrm>
           <a:prstGeom prst="roundRect">
             <a:avLst>
-              <a:gd name="adj" fmla="val 3636"/>
+              <a:gd name="adj" fmla="val 7805"/>
             </a:avLst>
           </a:prstGeom>
           <a:solidFill>
@@ -8223,14 +9710,14 @@
       </p:sp>
       <p:sp>
         <p:nvSpPr>
-          <p:cNvPr id="5" name="icone-fundo-97"/>
+          <p:cNvPr id="5" name="icone-fundo-103"/>
           <p:cNvSpPr/>
           <p:nvPr/>
         </p:nvSpPr>
         <p:spPr>
           <a:xfrm>
-            <a:off x="914400" y="2331720"/>
-            <a:ext cx="640080" cy="640080"/>
+            <a:off x="914400" y="2286000"/>
+            <a:ext cx="548640" cy="548640"/>
           </a:xfrm>
           <a:prstGeom prst="ellipse">
             <a:avLst/>
@@ -8243,7 +9730,7 @@
       </p:sp>
       <p:pic>
         <p:nvPicPr>
-          <p:cNvPr id="6" name="icone-98" descr="preencoded.png">    </p:cNvPr>
+          <p:cNvPr id="6" name="icone-104" descr="preencoded.png">    </p:cNvPr>
           <p:cNvPicPr>
             <a:picLocks noChangeAspect="1"/>
           </p:cNvPicPr>
@@ -8257,8 +9744,8 @@
         </p:blipFill>
         <p:spPr>
           <a:xfrm>
-            <a:off x="1074420" y="2491740"/>
-            <a:ext cx="320040" cy="320040"/>
+            <a:off x="1051560" y="2423160"/>
+            <a:ext cx="274320" cy="274320"/>
           </a:xfrm>
           <a:prstGeom prst="rect">
             <a:avLst/>
@@ -8267,14 +9754,14 @@
       </p:pic>
       <p:sp>
         <p:nvSpPr>
-          <p:cNvPr id="7" name="texto-99"/>
+          <p:cNvPr id="7" name="texto-105"/>
           <p:cNvSpPr txBox="1"/>
           <p:nvPr/>
         </p:nvSpPr>
         <p:spPr>
           <a:xfrm>
-            <a:off x="1783080" y="2331720"/>
-            <a:ext cx="3809848" cy="640080"/>
+            <a:off x="1783080" y="2286000"/>
+            <a:ext cx="3809848" cy="365760"/>
           </a:xfrm>
           <a:prstGeom prst="rect">
             <a:avLst/>
@@ -8290,27 +9777,27 @@
               <a:buNone/>
             </a:pPr>
             <a:r>
-              <a:rPr lang="en-US" sz="1800" b="1" dirty="0">
+              <a:rPr lang="en-US" sz="1600" b="1" dirty="0">
                 <a:solidFill>
                   <a:schemeClr val="accent1"/>
                 </a:solidFill>
               </a:rPr>
-              <a:t>Coluna informativa</a:t>
-            </a:r>
-            <a:endParaRPr lang="en-US" sz="1800" dirty="0"/>
-          </a:p>
-        </p:txBody>
-      </p:sp>
-      <p:sp>
-        <p:nvSpPr>
-          <p:cNvPr id="8" name="texto-100"/>
+              <a:t>Primeira frente</a:t>
+            </a:r>
+            <a:endParaRPr lang="en-US" sz="1600" dirty="0"/>
+          </a:p>
+        </p:txBody>
+      </p:sp>
+      <p:sp>
+        <p:nvSpPr>
+          <p:cNvPr id="8" name="texto-106"/>
           <p:cNvSpPr txBox="1"/>
           <p:nvPr/>
         </p:nvSpPr>
         <p:spPr>
           <a:xfrm>
-            <a:off x="914400" y="3154680"/>
-            <a:ext cx="4678528" cy="2651760"/>
+            <a:off x="1783080" y="2670048"/>
+            <a:ext cx="3809848" cy="1051560"/>
           </a:xfrm>
           <a:prstGeom prst="rect">
             <a:avLst/>
@@ -8322,12 +9809,8 @@
           <a:bodyPr wrap="square" lIns="0" tIns="0" rIns="0" bIns="0" rtlCol="0" anchor="t"/>
           <a:lstStyle/>
           <a:p>
-            <a:pPr marL="342900" indent="-342900">
-              <a:spcAft>
-                <a:spcPts val="800"/>
-              </a:spcAft>
-              <a:buSzPct val="100000"/>
-              <a:buChar char="•"/>
+            <a:pPr indent="0" marL="0">
+              <a:buNone/>
             </a:pPr>
             <a:r>
               <a:rPr lang="en-US" sz="1400" dirty="0">
@@ -8335,63 +9818,47 @@
                   <a:schemeClr val="tx1"/>
                 </a:solidFill>
               </a:rPr>
-              <a:t>Primeiro ponto da lista.</a:t>
+              <a:t>Descrição curta do que é feito e por quem.</a:t>
             </a:r>
             <a:endParaRPr lang="en-US" sz="1400" dirty="0"/>
           </a:p>
-          <a:p>
-            <a:pPr marL="342900" indent="-342900">
-              <a:spcAft>
-                <a:spcPts val="800"/>
-              </a:spcAft>
-              <a:buSzPct val="100000"/>
-              <a:buChar char="•"/>
-            </a:pPr>
-            <a:r>
-              <a:rPr lang="en-US" sz="1400" dirty="0">
-                <a:solidFill>
-                  <a:schemeClr val="tx1"/>
-                </a:solidFill>
-              </a:rPr>
-              <a:t>Segundo ponto da lista.</a:t>
-            </a:r>
-            <a:endParaRPr lang="en-US" sz="1400" dirty="0"/>
-          </a:p>
-          <a:p>
-            <a:pPr marL="342900" indent="-342900">
-              <a:spcAft>
-                <a:spcPts val="800"/>
-              </a:spcAft>
-              <a:buSzPct val="100000"/>
-              <a:buChar char="•"/>
-            </a:pPr>
-            <a:r>
-              <a:rPr lang="en-US" sz="1400" dirty="0">
-                <a:solidFill>
-                  <a:schemeClr val="tx1"/>
-                </a:solidFill>
-              </a:rPr>
-              <a:t>Terceiro ponto da lista.</a:t>
-            </a:r>
-            <a:endParaRPr lang="en-US" sz="1400" dirty="0"/>
-          </a:p>
-        </p:txBody>
-      </p:sp>
-      <p:sp>
-        <p:nvSpPr>
-          <p:cNvPr id="9" name="card-101"/>
+        </p:txBody>
+      </p:sp>
+      <p:sp>
+        <p:nvSpPr>
+          <p:cNvPr id="9" name="card-107"/>
           <p:cNvSpPr/>
           <p:nvPr/>
         </p:nvSpPr>
         <p:spPr>
           <a:xfrm>
             <a:off x="6233008" y="2011680"/>
-            <a:ext cx="5410048" cy="4023360"/>
+            <a:ext cx="5410048" cy="1874520"/>
           </a:xfrm>
           <a:prstGeom prst="roundRect">
             <a:avLst>
-              <a:gd name="adj" fmla="val 3636"/>
+              <a:gd name="adj" fmla="val 7805"/>
             </a:avLst>
+          </a:prstGeom>
+          <a:solidFill>
+            <a:schemeClr val="bg2"/>
+          </a:solidFill>
+          <a:ln/>
+        </p:spPr>
+      </p:sp>
+      <p:sp>
+        <p:nvSpPr>
+          <p:cNvPr id="10" name="icone-fundo-108"/>
+          <p:cNvSpPr/>
+          <p:nvPr/>
+        </p:nvSpPr>
+        <p:spPr>
+          <a:xfrm>
+            <a:off x="6598768" y="2286000"/>
+            <a:ext cx="548640" cy="548640"/>
+          </a:xfrm>
+          <a:prstGeom prst="ellipse">
+            <a:avLst/>
           </a:prstGeom>
           <a:solidFill>
             <a:schemeClr val="accent1"/>
@@ -8399,29 +9866,9 @@
           <a:ln/>
         </p:spPr>
       </p:sp>
-      <p:sp>
-        <p:nvSpPr>
-          <p:cNvPr id="10" name="icone-fundo-102"/>
-          <p:cNvSpPr/>
-          <p:nvPr/>
-        </p:nvSpPr>
-        <p:spPr>
-          <a:xfrm>
-            <a:off x="6598768" y="2331720"/>
-            <a:ext cx="640080" cy="640080"/>
-          </a:xfrm>
-          <a:prstGeom prst="ellipse">
-            <a:avLst/>
-          </a:prstGeom>
-          <a:solidFill>
-            <a:schemeClr val="accent2"/>
-          </a:solidFill>
-          <a:ln/>
-        </p:spPr>
-      </p:sp>
       <p:pic>
         <p:nvPicPr>
-          <p:cNvPr id="11" name="icone-103" descr="preencoded.png">    </p:cNvPr>
+          <p:cNvPr id="11" name="icone-109" descr="preencoded.png">    </p:cNvPr>
           <p:cNvPicPr>
             <a:picLocks noChangeAspect="1"/>
           </p:cNvPicPr>
@@ -8435,8 +9882,8 @@
         </p:blipFill>
         <p:spPr>
           <a:xfrm>
-            <a:off x="6758788" y="2491740"/>
-            <a:ext cx="320040" cy="320040"/>
+            <a:off x="6735928" y="2423160"/>
+            <a:ext cx="274320" cy="274320"/>
           </a:xfrm>
           <a:prstGeom prst="rect">
             <a:avLst/>
@@ -8445,14 +9892,14 @@
       </p:pic>
       <p:sp>
         <p:nvSpPr>
-          <p:cNvPr id="12" name="texto-104"/>
+          <p:cNvPr id="12" name="texto-110"/>
           <p:cNvSpPr txBox="1"/>
           <p:nvPr/>
         </p:nvSpPr>
         <p:spPr>
           <a:xfrm>
-            <a:off x="7467448" y="2331720"/>
-            <a:ext cx="3809848" cy="640080"/>
+            <a:off x="7467448" y="2286000"/>
+            <a:ext cx="3809848" cy="365760"/>
           </a:xfrm>
           <a:prstGeom prst="rect">
             <a:avLst/>
@@ -8468,27 +9915,27 @@
               <a:buNone/>
             </a:pPr>
             <a:r>
-              <a:rPr lang="en-US" sz="1800" b="1" dirty="0">
-                <a:solidFill>
-                  <a:schemeClr val="bg1"/>
+              <a:rPr lang="en-US" sz="1600" b="1" dirty="0">
+                <a:solidFill>
+                  <a:schemeClr val="accent1"/>
                 </a:solidFill>
               </a:rPr>
-              <a:t>Coluna em destaque</a:t>
-            </a:r>
-            <a:endParaRPr lang="en-US" sz="1800" dirty="0"/>
-          </a:p>
-        </p:txBody>
-      </p:sp>
-      <p:sp>
-        <p:nvSpPr>
-          <p:cNvPr id="13" name="texto-105"/>
+              <a:t>Segunda frente</a:t>
+            </a:r>
+            <a:endParaRPr lang="en-US" sz="1600" dirty="0"/>
+          </a:p>
+        </p:txBody>
+      </p:sp>
+      <p:sp>
+        <p:nvSpPr>
+          <p:cNvPr id="13" name="texto-111"/>
           <p:cNvSpPr txBox="1"/>
           <p:nvPr/>
         </p:nvSpPr>
         <p:spPr>
           <a:xfrm>
-            <a:off x="6598768" y="3154680"/>
-            <a:ext cx="4678528" cy="2651760"/>
+            <a:off x="7467448" y="2670048"/>
+            <a:ext cx="3809848" cy="1051560"/>
           </a:xfrm>
           <a:prstGeom prst="rect">
             <a:avLst/>
@@ -8500,38 +9947,292 @@
           <a:bodyPr wrap="square" lIns="0" tIns="0" rIns="0" bIns="0" rtlCol="0" anchor="t"/>
           <a:lstStyle/>
           <a:p>
-            <a:pPr marL="342900" indent="-342900">
-              <a:spcAft>
-                <a:spcPts val="800"/>
-              </a:spcAft>
-              <a:buSzPct val="100000"/>
-              <a:buChar char="•"/>
+            <a:pPr indent="0" marL="0">
+              <a:buNone/>
             </a:pPr>
             <a:r>
               <a:rPr lang="en-US" sz="1400" dirty="0">
                 <a:solidFill>
-                  <a:schemeClr val="bg1"/>
+                  <a:schemeClr val="tx1"/>
                 </a:solidFill>
               </a:rPr>
-              <a:t>Primeiro ponto da lista.</a:t>
+              <a:t>Descrição curta do que é feito e por quem.</a:t>
             </a:r>
             <a:endParaRPr lang="en-US" sz="1400" dirty="0"/>
           </a:p>
-          <a:p>
-            <a:pPr marL="342900" indent="-342900">
-              <a:spcAft>
-                <a:spcPts val="800"/>
-              </a:spcAft>
-              <a:buSzPct val="100000"/>
-              <a:buChar char="•"/>
+        </p:txBody>
+      </p:sp>
+      <p:sp>
+        <p:nvSpPr>
+          <p:cNvPr id="14" name="card-112"/>
+          <p:cNvSpPr/>
+          <p:nvPr/>
+        </p:nvSpPr>
+        <p:spPr>
+          <a:xfrm>
+            <a:off x="548640" y="4160520"/>
+            <a:ext cx="5410048" cy="1874520"/>
+          </a:xfrm>
+          <a:prstGeom prst="roundRect">
+            <a:avLst>
+              <a:gd name="adj" fmla="val 7805"/>
+            </a:avLst>
+          </a:prstGeom>
+          <a:solidFill>
+            <a:schemeClr val="bg2"/>
+          </a:solidFill>
+          <a:ln/>
+        </p:spPr>
+      </p:sp>
+      <p:sp>
+        <p:nvSpPr>
+          <p:cNvPr id="15" name="icone-fundo-113"/>
+          <p:cNvSpPr/>
+          <p:nvPr/>
+        </p:nvSpPr>
+        <p:spPr>
+          <a:xfrm>
+            <a:off x="914400" y="4434840"/>
+            <a:ext cx="548640" cy="548640"/>
+          </a:xfrm>
+          <a:prstGeom prst="ellipse">
+            <a:avLst/>
+          </a:prstGeom>
+          <a:solidFill>
+            <a:schemeClr val="accent1"/>
+          </a:solidFill>
+          <a:ln/>
+        </p:spPr>
+      </p:sp>
+      <p:pic>
+        <p:nvPicPr>
+          <p:cNvPr id="16" name="icone-114" descr="preencoded.png">    </p:cNvPr>
+          <p:cNvPicPr>
+            <a:picLocks noChangeAspect="1"/>
+          </p:cNvPicPr>
+          <p:nvPr/>
+        </p:nvPicPr>
+        <p:blipFill>
+          <a:blip r:embed="rId3"/>
+          <a:stretch>
+            <a:fillRect/>
+          </a:stretch>
+        </p:blipFill>
+        <p:spPr>
+          <a:xfrm>
+            <a:off x="1051560" y="4572000"/>
+            <a:ext cx="274320" cy="274320"/>
+          </a:xfrm>
+          <a:prstGeom prst="rect">
+            <a:avLst/>
+          </a:prstGeom>
+        </p:spPr>
+      </p:pic>
+      <p:sp>
+        <p:nvSpPr>
+          <p:cNvPr id="17" name="texto-115"/>
+          <p:cNvSpPr txBox="1"/>
+          <p:nvPr/>
+        </p:nvSpPr>
+        <p:spPr>
+          <a:xfrm>
+            <a:off x="1783080" y="4434840"/>
+            <a:ext cx="3809848" cy="365760"/>
+          </a:xfrm>
+          <a:prstGeom prst="rect">
+            <a:avLst/>
+          </a:prstGeom>
+          <a:noFill/>
+          <a:ln/>
+        </p:spPr>
+        <p:txBody>
+          <a:bodyPr wrap="square" lIns="0" tIns="0" rIns="0" bIns="0" rtlCol="0" anchor="ctr"/>
+          <a:lstStyle/>
+          <a:p>
+            <a:pPr indent="0" marL="0">
+              <a:buNone/>
+            </a:pPr>
+            <a:r>
+              <a:rPr lang="en-US" sz="1600" b="1" dirty="0">
+                <a:solidFill>
+                  <a:schemeClr val="accent1"/>
+                </a:solidFill>
+              </a:rPr>
+              <a:t>Terceira frente</a:t>
+            </a:r>
+            <a:endParaRPr lang="en-US" sz="1600" dirty="0"/>
+          </a:p>
+        </p:txBody>
+      </p:sp>
+      <p:sp>
+        <p:nvSpPr>
+          <p:cNvPr id="18" name="texto-116"/>
+          <p:cNvSpPr txBox="1"/>
+          <p:nvPr/>
+        </p:nvSpPr>
+        <p:spPr>
+          <a:xfrm>
+            <a:off x="1783080" y="4818888"/>
+            <a:ext cx="3809848" cy="1051560"/>
+          </a:xfrm>
+          <a:prstGeom prst="rect">
+            <a:avLst/>
+          </a:prstGeom>
+          <a:noFill/>
+          <a:ln/>
+        </p:spPr>
+        <p:txBody>
+          <a:bodyPr wrap="square" lIns="0" tIns="0" rIns="0" bIns="0" rtlCol="0" anchor="t"/>
+          <a:lstStyle/>
+          <a:p>
+            <a:pPr indent="0" marL="0">
+              <a:buNone/>
             </a:pPr>
             <a:r>
               <a:rPr lang="en-US" sz="1400" dirty="0">
                 <a:solidFill>
-                  <a:schemeClr val="bg1"/>
+                  <a:schemeClr val="tx1"/>
                 </a:solidFill>
               </a:rPr>
-              <a:t>Segundo ponto da lista.</a:t>
+              <a:t>Descrição curta do que é feito e por quem.</a:t>
+            </a:r>
+            <a:endParaRPr lang="en-US" sz="1400" dirty="0"/>
+          </a:p>
+        </p:txBody>
+      </p:sp>
+      <p:sp>
+        <p:nvSpPr>
+          <p:cNvPr id="19" name="card-117"/>
+          <p:cNvSpPr/>
+          <p:nvPr/>
+        </p:nvSpPr>
+        <p:spPr>
+          <a:xfrm>
+            <a:off x="6233008" y="4160520"/>
+            <a:ext cx="5410048" cy="1874520"/>
+          </a:xfrm>
+          <a:prstGeom prst="roundRect">
+            <a:avLst>
+              <a:gd name="adj" fmla="val 7805"/>
+            </a:avLst>
+          </a:prstGeom>
+          <a:solidFill>
+            <a:schemeClr val="bg2"/>
+          </a:solidFill>
+          <a:ln/>
+        </p:spPr>
+      </p:sp>
+      <p:sp>
+        <p:nvSpPr>
+          <p:cNvPr id="20" name="icone-fundo-118"/>
+          <p:cNvSpPr/>
+          <p:nvPr/>
+        </p:nvSpPr>
+        <p:spPr>
+          <a:xfrm>
+            <a:off x="6598768" y="4434840"/>
+            <a:ext cx="548640" cy="548640"/>
+          </a:xfrm>
+          <a:prstGeom prst="ellipse">
+            <a:avLst/>
+          </a:prstGeom>
+          <a:solidFill>
+            <a:schemeClr val="accent1"/>
+          </a:solidFill>
+          <a:ln/>
+        </p:spPr>
+      </p:sp>
+      <p:pic>
+        <p:nvPicPr>
+          <p:cNvPr id="21" name="icone-119" descr="preencoded.png">    </p:cNvPr>
+          <p:cNvPicPr>
+            <a:picLocks noChangeAspect="1"/>
+          </p:cNvPicPr>
+          <p:nvPr/>
+        </p:nvPicPr>
+        <p:blipFill>
+          <a:blip r:embed="rId4"/>
+          <a:stretch>
+            <a:fillRect/>
+          </a:stretch>
+        </p:blipFill>
+        <p:spPr>
+          <a:xfrm>
+            <a:off x="6735928" y="4572000"/>
+            <a:ext cx="274320" cy="274320"/>
+          </a:xfrm>
+          <a:prstGeom prst="rect">
+            <a:avLst/>
+          </a:prstGeom>
+        </p:spPr>
+      </p:pic>
+      <p:sp>
+        <p:nvSpPr>
+          <p:cNvPr id="22" name="texto-120"/>
+          <p:cNvSpPr txBox="1"/>
+          <p:nvPr/>
+        </p:nvSpPr>
+        <p:spPr>
+          <a:xfrm>
+            <a:off x="7467448" y="4434840"/>
+            <a:ext cx="3809848" cy="365760"/>
+          </a:xfrm>
+          <a:prstGeom prst="rect">
+            <a:avLst/>
+          </a:prstGeom>
+          <a:noFill/>
+          <a:ln/>
+        </p:spPr>
+        <p:txBody>
+          <a:bodyPr wrap="square" lIns="0" tIns="0" rIns="0" bIns="0" rtlCol="0" anchor="ctr"/>
+          <a:lstStyle/>
+          <a:p>
+            <a:pPr indent="0" marL="0">
+              <a:buNone/>
+            </a:pPr>
+            <a:r>
+              <a:rPr lang="en-US" sz="1600" b="1" dirty="0">
+                <a:solidFill>
+                  <a:schemeClr val="accent1"/>
+                </a:solidFill>
+              </a:rPr>
+              <a:t>Quarta frente</a:t>
+            </a:r>
+            <a:endParaRPr lang="en-US" sz="1600" dirty="0"/>
+          </a:p>
+        </p:txBody>
+      </p:sp>
+      <p:sp>
+        <p:nvSpPr>
+          <p:cNvPr id="23" name="texto-121"/>
+          <p:cNvSpPr txBox="1"/>
+          <p:nvPr/>
+        </p:nvSpPr>
+        <p:spPr>
+          <a:xfrm>
+            <a:off x="7467448" y="4818888"/>
+            <a:ext cx="3809848" cy="1051560"/>
+          </a:xfrm>
+          <a:prstGeom prst="rect">
+            <a:avLst/>
+          </a:prstGeom>
+          <a:noFill/>
+          <a:ln/>
+        </p:spPr>
+        <p:txBody>
+          <a:bodyPr wrap="square" lIns="0" tIns="0" rIns="0" bIns="0" rtlCol="0" anchor="t"/>
+          <a:lstStyle/>
+          <a:p>
+            <a:pPr indent="0" marL="0">
+              <a:buNone/>
+            </a:pPr>
+            <a:r>
+              <a:rPr lang="en-US" sz="1400" dirty="0">
+                <a:solidFill>
+                  <a:schemeClr val="tx1"/>
+                </a:solidFill>
+              </a:rPr>
+              <a:t>Descrição curta do que é feito e por quem.</a:t>
             </a:r>
             <a:endParaRPr lang="en-US" sz="1400" dirty="0"/>
           </a:p>
